--- a/figures/figure1_v2.pptx
+++ b/figures/figure1_v2.pptx
@@ -5,8 +5,7 @@
     <p:sldMasterId id="2147483648" r:id="rId1"/>
   </p:sldMasterIdLst>
   <p:sldIdLst>
-    <p:sldId id="259" r:id="rId2"/>
-    <p:sldId id="260" r:id="rId3"/>
+    <p:sldId id="260" r:id="rId2"/>
   </p:sldIdLst>
   <p:sldSz cx="12192000" cy="6858000"/>
   <p:notesSz cx="6858000" cy="9144000"/>
@@ -162,52 +161,20 @@
   </pc:docChgLst>
   <pc:docChgLst>
     <pc:chgData name="Castiello de Obeso, Santiago" userId="b4fc0b8e-1f0e-417a-8aad-015961d2398a" providerId="ADAL" clId="{AE23CADE-1E1E-4A42-BA53-D7F25A2D2BFC}"/>
-    <pc:docChg chg="undo custSel addSld modSld">
-      <pc:chgData name="Castiello de Obeso, Santiago" userId="b4fc0b8e-1f0e-417a-8aad-015961d2398a" providerId="ADAL" clId="{AE23CADE-1E1E-4A42-BA53-D7F25A2D2BFC}" dt="2025-08-06T13:42:18.041" v="539" actId="21"/>
+    <pc:docChg chg="undo custSel addSld delSld modSld">
+      <pc:chgData name="Castiello de Obeso, Santiago" userId="b4fc0b8e-1f0e-417a-8aad-015961d2398a" providerId="ADAL" clId="{AE23CADE-1E1E-4A42-BA53-D7F25A2D2BFC}" dt="2025-08-26T14:32:41.088" v="542" actId="47"/>
       <pc:docMkLst>
         <pc:docMk/>
       </pc:docMkLst>
-      <pc:sldChg chg="modSp mod">
-        <pc:chgData name="Castiello de Obeso, Santiago" userId="b4fc0b8e-1f0e-417a-8aad-015961d2398a" providerId="ADAL" clId="{AE23CADE-1E1E-4A42-BA53-D7F25A2D2BFC}" dt="2025-07-21T14:25:07.751" v="225" actId="20577"/>
+      <pc:sldChg chg="modSp del mod">
+        <pc:chgData name="Castiello de Obeso, Santiago" userId="b4fc0b8e-1f0e-417a-8aad-015961d2398a" providerId="ADAL" clId="{AE23CADE-1E1E-4A42-BA53-D7F25A2D2BFC}" dt="2025-08-26T14:32:39.868" v="540" actId="47"/>
         <pc:sldMkLst>
           <pc:docMk/>
           <pc:sldMk cId="2654144847" sldId="259"/>
         </pc:sldMkLst>
-        <pc:spChg chg="mod">
-          <ac:chgData name="Castiello de Obeso, Santiago" userId="b4fc0b8e-1f0e-417a-8aad-015961d2398a" providerId="ADAL" clId="{AE23CADE-1E1E-4A42-BA53-D7F25A2D2BFC}" dt="2025-07-21T14:25:07.751" v="225" actId="20577"/>
-          <ac:spMkLst>
-            <pc:docMk/>
-            <pc:sldMk cId="2654144847" sldId="259"/>
-            <ac:spMk id="8" creationId="{85B11580-FDAF-8538-220E-5EEE2CF22035}"/>
-          </ac:spMkLst>
-        </pc:spChg>
-        <pc:spChg chg="mod">
-          <ac:chgData name="Castiello de Obeso, Santiago" userId="b4fc0b8e-1f0e-417a-8aad-015961d2398a" providerId="ADAL" clId="{AE23CADE-1E1E-4A42-BA53-D7F25A2D2BFC}" dt="2025-07-21T14:25:06.948" v="223" actId="20577"/>
-          <ac:spMkLst>
-            <pc:docMk/>
-            <pc:sldMk cId="2654144847" sldId="259"/>
-            <ac:spMk id="9" creationId="{5E31001B-935F-24AA-5CC8-8ADA95188CEF}"/>
-          </ac:spMkLst>
-        </pc:spChg>
-        <pc:spChg chg="mod">
-          <ac:chgData name="Castiello de Obeso, Santiago" userId="b4fc0b8e-1f0e-417a-8aad-015961d2398a" providerId="ADAL" clId="{AE23CADE-1E1E-4A42-BA53-D7F25A2D2BFC}" dt="2025-07-21T14:25:06.197" v="222" actId="20577"/>
-          <ac:spMkLst>
-            <pc:docMk/>
-            <pc:sldMk cId="2654144847" sldId="259"/>
-            <ac:spMk id="40" creationId="{A1EF6CC4-6979-430C-2D76-5128E47B5B4D}"/>
-          </ac:spMkLst>
-        </pc:spChg>
-        <pc:spChg chg="mod">
-          <ac:chgData name="Castiello de Obeso, Santiago" userId="b4fc0b8e-1f0e-417a-8aad-015961d2398a" providerId="ADAL" clId="{AE23CADE-1E1E-4A42-BA53-D7F25A2D2BFC}" dt="2025-07-21T14:25:07.353" v="224" actId="20577"/>
-          <ac:spMkLst>
-            <pc:docMk/>
-            <pc:sldMk cId="2654144847" sldId="259"/>
-            <ac:spMk id="41" creationId="{F720A80D-6AD3-C154-42BC-5E90DE8B6447}"/>
-          </ac:spMkLst>
-        </pc:spChg>
       </pc:sldChg>
-      <pc:sldChg chg="addSp delSp modSp add mod">
-        <pc:chgData name="Castiello de Obeso, Santiago" userId="b4fc0b8e-1f0e-417a-8aad-015961d2398a" providerId="ADAL" clId="{AE23CADE-1E1E-4A42-BA53-D7F25A2D2BFC}" dt="2025-08-06T13:42:18.041" v="539" actId="21"/>
+      <pc:sldChg chg="addSp delSp modSp add del mod">
+        <pc:chgData name="Castiello de Obeso, Santiago" userId="b4fc0b8e-1f0e-417a-8aad-015961d2398a" providerId="ADAL" clId="{AE23CADE-1E1E-4A42-BA53-D7F25A2D2BFC}" dt="2025-08-26T14:32:41.088" v="542" actId="47"/>
         <pc:sldMkLst>
           <pc:docMk/>
           <pc:sldMk cId="1224849072" sldId="260"/>
@@ -476,14 +443,6 @@
             <ac:grpSpMk id="194" creationId="{D7DCB42A-CA4A-ABA7-960F-3A384C580014}"/>
           </ac:grpSpMkLst>
         </pc:grpChg>
-        <pc:picChg chg="add del">
-          <ac:chgData name="Castiello de Obeso, Santiago" userId="b4fc0b8e-1f0e-417a-8aad-015961d2398a" providerId="ADAL" clId="{AE23CADE-1E1E-4A42-BA53-D7F25A2D2BFC}" dt="2025-08-06T13:42:18.041" v="539" actId="21"/>
-          <ac:picMkLst>
-            <pc:docMk/>
-            <pc:sldMk cId="1224849072" sldId="260"/>
-            <ac:picMk id="2" creationId="{1FD8677B-3B0A-5C84-89F4-0833EE190BD3}"/>
-          </ac:picMkLst>
-        </pc:picChg>
         <pc:cxnChg chg="mod">
           <ac:chgData name="Castiello de Obeso, Santiago" userId="b4fc0b8e-1f0e-417a-8aad-015961d2398a" providerId="ADAL" clId="{AE23CADE-1E1E-4A42-BA53-D7F25A2D2BFC}" dt="2025-07-22T15:16:15.395" v="511" actId="1076"/>
           <ac:cxnSpMkLst>
@@ -767,7 +726,7 @@
           <a:p>
             <a:fld id="{0AFA125D-6C16-440D-B65A-850231F6884E}" type="datetimeFigureOut">
               <a:rPr lang="en-GB" smtClean="0"/>
-              <a:t>06/08/2025</a:t>
+              <a:t>26/08/2025</a:t>
             </a:fld>
             <a:endParaRPr lang="en-GB"/>
           </a:p>
@@ -967,7 +926,7 @@
           <a:p>
             <a:fld id="{0AFA125D-6C16-440D-B65A-850231F6884E}" type="datetimeFigureOut">
               <a:rPr lang="en-GB" smtClean="0"/>
-              <a:t>06/08/2025</a:t>
+              <a:t>26/08/2025</a:t>
             </a:fld>
             <a:endParaRPr lang="en-GB"/>
           </a:p>
@@ -1177,7 +1136,7 @@
           <a:p>
             <a:fld id="{0AFA125D-6C16-440D-B65A-850231F6884E}" type="datetimeFigureOut">
               <a:rPr lang="en-GB" smtClean="0"/>
-              <a:t>06/08/2025</a:t>
+              <a:t>26/08/2025</a:t>
             </a:fld>
             <a:endParaRPr lang="en-GB"/>
           </a:p>
@@ -1377,7 +1336,7 @@
           <a:p>
             <a:fld id="{0AFA125D-6C16-440D-B65A-850231F6884E}" type="datetimeFigureOut">
               <a:rPr lang="en-GB" smtClean="0"/>
-              <a:t>06/08/2025</a:t>
+              <a:t>26/08/2025</a:t>
             </a:fld>
             <a:endParaRPr lang="en-GB"/>
           </a:p>
@@ -1653,7 +1612,7 @@
           <a:p>
             <a:fld id="{0AFA125D-6C16-440D-B65A-850231F6884E}" type="datetimeFigureOut">
               <a:rPr lang="en-GB" smtClean="0"/>
-              <a:t>06/08/2025</a:t>
+              <a:t>26/08/2025</a:t>
             </a:fld>
             <a:endParaRPr lang="en-GB"/>
           </a:p>
@@ -1921,7 +1880,7 @@
           <a:p>
             <a:fld id="{0AFA125D-6C16-440D-B65A-850231F6884E}" type="datetimeFigureOut">
               <a:rPr lang="en-GB" smtClean="0"/>
-              <a:t>06/08/2025</a:t>
+              <a:t>26/08/2025</a:t>
             </a:fld>
             <a:endParaRPr lang="en-GB"/>
           </a:p>
@@ -2336,7 +2295,7 @@
           <a:p>
             <a:fld id="{0AFA125D-6C16-440D-B65A-850231F6884E}" type="datetimeFigureOut">
               <a:rPr lang="en-GB" smtClean="0"/>
-              <a:t>06/08/2025</a:t>
+              <a:t>26/08/2025</a:t>
             </a:fld>
             <a:endParaRPr lang="en-GB"/>
           </a:p>
@@ -2478,7 +2437,7 @@
           <a:p>
             <a:fld id="{0AFA125D-6C16-440D-B65A-850231F6884E}" type="datetimeFigureOut">
               <a:rPr lang="en-GB" smtClean="0"/>
-              <a:t>06/08/2025</a:t>
+              <a:t>26/08/2025</a:t>
             </a:fld>
             <a:endParaRPr lang="en-GB"/>
           </a:p>
@@ -2591,7 +2550,7 @@
           <a:p>
             <a:fld id="{0AFA125D-6C16-440D-B65A-850231F6884E}" type="datetimeFigureOut">
               <a:rPr lang="en-GB" smtClean="0"/>
-              <a:t>06/08/2025</a:t>
+              <a:t>26/08/2025</a:t>
             </a:fld>
             <a:endParaRPr lang="en-GB"/>
           </a:p>
@@ -2904,7 +2863,7 @@
           <a:p>
             <a:fld id="{0AFA125D-6C16-440D-B65A-850231F6884E}" type="datetimeFigureOut">
               <a:rPr lang="en-GB" smtClean="0"/>
-              <a:t>06/08/2025</a:t>
+              <a:t>26/08/2025</a:t>
             </a:fld>
             <a:endParaRPr lang="en-GB"/>
           </a:p>
@@ -3193,7 +3152,7 @@
           <a:p>
             <a:fld id="{0AFA125D-6C16-440D-B65A-850231F6884E}" type="datetimeFigureOut">
               <a:rPr lang="en-GB" smtClean="0"/>
-              <a:t>06/08/2025</a:t>
+              <a:t>26/08/2025</a:t>
             </a:fld>
             <a:endParaRPr lang="en-GB"/>
           </a:p>
@@ -3436,7 +3395,7 @@
           <a:p>
             <a:fld id="{0AFA125D-6C16-440D-B65A-850231F6884E}" type="datetimeFigureOut">
               <a:rPr lang="en-GB" smtClean="0"/>
-              <a:t>06/08/2025</a:t>
+              <a:t>26/08/2025</a:t>
             </a:fld>
             <a:endParaRPr lang="en-GB"/>
           </a:p>
@@ -3837,2691 +3796,6 @@
 </file>
 
 <file path=ppt/slides/slide1.xml><?xml version="1.0" encoding="utf-8"?>
-<p:sld xmlns:a="http://schemas.openxmlformats.org/drawingml/2006/main" xmlns:r="http://schemas.openxmlformats.org/officeDocument/2006/relationships" xmlns:p="http://schemas.openxmlformats.org/presentationml/2006/main">
-  <p:cSld>
-    <p:spTree>
-      <p:nvGrpSpPr>
-        <p:cNvPr id="1" name="">
-          <a:extLst>
-            <a:ext uri="{FF2B5EF4-FFF2-40B4-BE49-F238E27FC236}">
-              <a16:creationId xmlns:a16="http://schemas.microsoft.com/office/drawing/2014/main" id="{731546F8-4FBF-EFE5-43F8-D39B65F6A8BC}"/>
-            </a:ext>
-          </a:extLst>
-        </p:cNvPr>
-        <p:cNvGrpSpPr/>
-        <p:nvPr/>
-      </p:nvGrpSpPr>
-      <p:grpSpPr>
-        <a:xfrm>
-          <a:off x="0" y="0"/>
-          <a:ext cx="0" cy="0"/>
-          <a:chOff x="0" y="0"/>
-          <a:chExt cx="0" cy="0"/>
-        </a:xfrm>
-      </p:grpSpPr>
-      <p:sp>
-        <p:nvSpPr>
-          <p:cNvPr id="8" name="Rectangle 7">
-            <a:extLst>
-              <a:ext uri="{FF2B5EF4-FFF2-40B4-BE49-F238E27FC236}">
-                <a16:creationId xmlns:a16="http://schemas.microsoft.com/office/drawing/2014/main" id="{85B11580-FDAF-8538-220E-5EEE2CF22035}"/>
-              </a:ext>
-            </a:extLst>
-          </p:cNvPr>
-          <p:cNvSpPr/>
-          <p:nvPr/>
-        </p:nvSpPr>
-        <p:spPr>
-          <a:xfrm>
-            <a:off x="136804" y="2567875"/>
-            <a:ext cx="1800000" cy="648000"/>
-          </a:xfrm>
-          <a:prstGeom prst="rect">
-            <a:avLst/>
-          </a:prstGeom>
-          <a:solidFill>
-            <a:srgbClr val="0072B2">
-              <a:alpha val="20000"/>
-            </a:srgbClr>
-          </a:solidFill>
-        </p:spPr>
-        <p:style>
-          <a:lnRef idx="2">
-            <a:schemeClr val="accent1">
-              <a:shade val="15000"/>
-            </a:schemeClr>
-          </a:lnRef>
-          <a:fillRef idx="1">
-            <a:schemeClr val="accent1"/>
-          </a:fillRef>
-          <a:effectRef idx="0">
-            <a:schemeClr val="accent1"/>
-          </a:effectRef>
-          <a:fontRef idx="minor">
-            <a:schemeClr val="lt1"/>
-          </a:fontRef>
-        </p:style>
-        <p:txBody>
-          <a:bodyPr rtlCol="0" anchor="ctr"/>
-          <a:lstStyle/>
-          <a:p>
-            <a:pPr algn="ctr"/>
-            <a:r>
-              <a:rPr lang="en-GB" sz="1400" dirty="0">
-                <a:solidFill>
-                  <a:srgbClr val="0072B2"/>
-                </a:solidFill>
-              </a:rPr>
-              <a:t>Anxious</a:t>
-            </a:r>
-          </a:p>
-        </p:txBody>
-      </p:sp>
-      <p:sp>
-        <p:nvSpPr>
-          <p:cNvPr id="9" name="Rectangle 8">
-            <a:extLst>
-              <a:ext uri="{FF2B5EF4-FFF2-40B4-BE49-F238E27FC236}">
-                <a16:creationId xmlns:a16="http://schemas.microsoft.com/office/drawing/2014/main" id="{5E31001B-935F-24AA-5CC8-8ADA95188CEF}"/>
-              </a:ext>
-            </a:extLst>
-          </p:cNvPr>
-          <p:cNvSpPr/>
-          <p:nvPr/>
-        </p:nvSpPr>
-        <p:spPr>
-          <a:xfrm>
-            <a:off x="2443125" y="2561108"/>
-            <a:ext cx="1800000" cy="648000"/>
-          </a:xfrm>
-          <a:prstGeom prst="rect">
-            <a:avLst/>
-          </a:prstGeom>
-          <a:solidFill>
-            <a:srgbClr val="D55E00">
-              <a:alpha val="20000"/>
-            </a:srgbClr>
-          </a:solidFill>
-        </p:spPr>
-        <p:style>
-          <a:lnRef idx="2">
-            <a:schemeClr val="accent1">
-              <a:shade val="15000"/>
-            </a:schemeClr>
-          </a:lnRef>
-          <a:fillRef idx="1">
-            <a:schemeClr val="accent1"/>
-          </a:fillRef>
-          <a:effectRef idx="0">
-            <a:schemeClr val="accent1"/>
-          </a:effectRef>
-          <a:fontRef idx="minor">
-            <a:schemeClr val="lt1"/>
-          </a:fontRef>
-        </p:style>
-        <p:txBody>
-          <a:bodyPr rtlCol="0" anchor="ctr"/>
-          <a:lstStyle/>
-          <a:p>
-            <a:pPr algn="ctr"/>
-            <a:r>
-              <a:rPr lang="en-GB" sz="1400" dirty="0">
-                <a:solidFill>
-                  <a:srgbClr val="D55E00"/>
-                </a:solidFill>
-              </a:rPr>
-              <a:t>Non-Anxious</a:t>
-            </a:r>
-          </a:p>
-        </p:txBody>
-      </p:sp>
-      <p:sp>
-        <p:nvSpPr>
-          <p:cNvPr id="13" name="Rectangle 12">
-            <a:extLst>
-              <a:ext uri="{FF2B5EF4-FFF2-40B4-BE49-F238E27FC236}">
-                <a16:creationId xmlns:a16="http://schemas.microsoft.com/office/drawing/2014/main" id="{2DC1EBFB-D96E-DA3B-15DB-7F2F974F50F2}"/>
-              </a:ext>
-            </a:extLst>
-          </p:cNvPr>
-          <p:cNvSpPr/>
-          <p:nvPr/>
-        </p:nvSpPr>
-        <p:spPr>
-          <a:xfrm>
-            <a:off x="1207697" y="4591954"/>
-            <a:ext cx="1800000" cy="648000"/>
-          </a:xfrm>
-          <a:prstGeom prst="rect">
-            <a:avLst/>
-          </a:prstGeom>
-          <a:solidFill>
-            <a:schemeClr val="bg1"/>
-          </a:solidFill>
-        </p:spPr>
-        <p:style>
-          <a:lnRef idx="2">
-            <a:schemeClr val="accent1">
-              <a:shade val="15000"/>
-            </a:schemeClr>
-          </a:lnRef>
-          <a:fillRef idx="1">
-            <a:schemeClr val="accent1"/>
-          </a:fillRef>
-          <a:effectRef idx="0">
-            <a:schemeClr val="accent1"/>
-          </a:effectRef>
-          <a:fontRef idx="minor">
-            <a:schemeClr val="lt1"/>
-          </a:fontRef>
-        </p:style>
-        <p:txBody>
-          <a:bodyPr rtlCol="0" anchor="ctr"/>
-          <a:lstStyle/>
-          <a:p>
-            <a:pPr algn="ctr"/>
-            <a:r>
-              <a:rPr lang="en-GB" sz="1400" dirty="0">
-                <a:solidFill>
-                  <a:schemeClr val="tx1"/>
-                </a:solidFill>
-              </a:rPr>
-              <a:t>Post-Chat Questionnaire</a:t>
-            </a:r>
-          </a:p>
-        </p:txBody>
-      </p:sp>
-      <p:sp>
-        <p:nvSpPr>
-          <p:cNvPr id="14" name="Rectangle 13">
-            <a:extLst>
-              <a:ext uri="{FF2B5EF4-FFF2-40B4-BE49-F238E27FC236}">
-                <a16:creationId xmlns:a16="http://schemas.microsoft.com/office/drawing/2014/main" id="{06AA3006-0CF3-423B-DB65-B71B7EF43290}"/>
-              </a:ext>
-            </a:extLst>
-          </p:cNvPr>
-          <p:cNvSpPr/>
-          <p:nvPr/>
-        </p:nvSpPr>
-        <p:spPr>
-          <a:xfrm>
-            <a:off x="1207697" y="5599626"/>
-            <a:ext cx="1800000" cy="648000"/>
-          </a:xfrm>
-          <a:prstGeom prst="rect">
-            <a:avLst/>
-          </a:prstGeom>
-          <a:solidFill>
-            <a:schemeClr val="bg1"/>
-          </a:solidFill>
-        </p:spPr>
-        <p:style>
-          <a:lnRef idx="2">
-            <a:schemeClr val="accent1">
-              <a:shade val="15000"/>
-            </a:schemeClr>
-          </a:lnRef>
-          <a:fillRef idx="1">
-            <a:schemeClr val="accent1"/>
-          </a:fillRef>
-          <a:effectRef idx="0">
-            <a:schemeClr val="accent1"/>
-          </a:effectRef>
-          <a:fontRef idx="minor">
-            <a:schemeClr val="lt1"/>
-          </a:fontRef>
-        </p:style>
-        <p:txBody>
-          <a:bodyPr rtlCol="0" anchor="ctr"/>
-          <a:lstStyle/>
-          <a:p>
-            <a:pPr algn="ctr"/>
-            <a:r>
-              <a:rPr lang="en-GB" sz="1400" dirty="0">
-                <a:solidFill>
-                  <a:schemeClr val="tx1"/>
-                </a:solidFill>
-              </a:rPr>
-              <a:t>Psychological Questionnaires</a:t>
-            </a:r>
-          </a:p>
-        </p:txBody>
-      </p:sp>
-      <p:sp>
-        <p:nvSpPr>
-          <p:cNvPr id="4" name="Oval 3">
-            <a:extLst>
-              <a:ext uri="{FF2B5EF4-FFF2-40B4-BE49-F238E27FC236}">
-                <a16:creationId xmlns:a16="http://schemas.microsoft.com/office/drawing/2014/main" id="{F773CAB8-C254-E57A-8CD3-8BF85BD4FDC1}"/>
-              </a:ext>
-            </a:extLst>
-          </p:cNvPr>
-          <p:cNvSpPr/>
-          <p:nvPr/>
-        </p:nvSpPr>
-        <p:spPr>
-          <a:xfrm>
-            <a:off x="3671998" y="6082538"/>
-            <a:ext cx="1800000" cy="648000"/>
-          </a:xfrm>
-          <a:prstGeom prst="ellipse">
-            <a:avLst/>
-          </a:prstGeom>
-          <a:solidFill>
-            <a:schemeClr val="bg1"/>
-          </a:solidFill>
-        </p:spPr>
-        <p:style>
-          <a:lnRef idx="2">
-            <a:schemeClr val="accent1">
-              <a:shade val="15000"/>
-            </a:schemeClr>
-          </a:lnRef>
-          <a:fillRef idx="1">
-            <a:schemeClr val="accent1"/>
-          </a:fillRef>
-          <a:effectRef idx="0">
-            <a:schemeClr val="accent1"/>
-          </a:effectRef>
-          <a:fontRef idx="minor">
-            <a:schemeClr val="lt1"/>
-          </a:fontRef>
-        </p:style>
-        <p:txBody>
-          <a:bodyPr rtlCol="0" anchor="ctr"/>
-          <a:lstStyle/>
-          <a:p>
-            <a:pPr algn="ctr"/>
-            <a:r>
-              <a:rPr lang="en-GB" sz="1400" dirty="0">
-                <a:solidFill>
-                  <a:schemeClr val="tx1"/>
-                </a:solidFill>
-              </a:rPr>
-              <a:t>End</a:t>
-            </a:r>
-          </a:p>
-        </p:txBody>
-      </p:sp>
-      <p:sp>
-        <p:nvSpPr>
-          <p:cNvPr id="16" name="Rectangle 15">
-            <a:extLst>
-              <a:ext uri="{FF2B5EF4-FFF2-40B4-BE49-F238E27FC236}">
-                <a16:creationId xmlns:a16="http://schemas.microsoft.com/office/drawing/2014/main" id="{CD47702D-FD66-A526-1E84-9BC60F2EB42B}"/>
-              </a:ext>
-            </a:extLst>
-          </p:cNvPr>
-          <p:cNvSpPr/>
-          <p:nvPr/>
-        </p:nvSpPr>
-        <p:spPr>
-          <a:xfrm>
-            <a:off x="4896551" y="2567875"/>
-            <a:ext cx="1800000" cy="648000"/>
-          </a:xfrm>
-          <a:prstGeom prst="rect">
-            <a:avLst/>
-          </a:prstGeom>
-          <a:solidFill>
-            <a:srgbClr val="CC79A7">
-              <a:alpha val="20000"/>
-            </a:srgbClr>
-          </a:solidFill>
-        </p:spPr>
-        <p:style>
-          <a:lnRef idx="2">
-            <a:schemeClr val="accent1">
-              <a:shade val="15000"/>
-            </a:schemeClr>
-          </a:lnRef>
-          <a:fillRef idx="1">
-            <a:schemeClr val="accent1"/>
-          </a:fillRef>
-          <a:effectRef idx="0">
-            <a:schemeClr val="accent1"/>
-          </a:effectRef>
-          <a:fontRef idx="minor">
-            <a:schemeClr val="lt1"/>
-          </a:fontRef>
-        </p:style>
-        <p:txBody>
-          <a:bodyPr rtlCol="0" anchor="ctr"/>
-          <a:lstStyle/>
-          <a:p>
-            <a:pPr algn="ctr"/>
-            <a:r>
-              <a:rPr lang="en-GB" sz="1400" dirty="0">
-                <a:solidFill>
-                  <a:srgbClr val="CC79A7"/>
-                </a:solidFill>
-              </a:rPr>
-              <a:t>Introvert</a:t>
-            </a:r>
-          </a:p>
-        </p:txBody>
-      </p:sp>
-      <p:sp>
-        <p:nvSpPr>
-          <p:cNvPr id="17" name="Rectangle 16">
-            <a:extLst>
-              <a:ext uri="{FF2B5EF4-FFF2-40B4-BE49-F238E27FC236}">
-                <a16:creationId xmlns:a16="http://schemas.microsoft.com/office/drawing/2014/main" id="{2592AB55-0808-784A-90FE-66F7F4784834}"/>
-              </a:ext>
-            </a:extLst>
-          </p:cNvPr>
-          <p:cNvSpPr/>
-          <p:nvPr/>
-        </p:nvSpPr>
-        <p:spPr>
-          <a:xfrm>
-            <a:off x="7205437" y="2561108"/>
-            <a:ext cx="1800000" cy="648000"/>
-          </a:xfrm>
-          <a:prstGeom prst="rect">
-            <a:avLst/>
-          </a:prstGeom>
-          <a:solidFill>
-            <a:srgbClr val="009E73">
-              <a:alpha val="20000"/>
-            </a:srgbClr>
-          </a:solidFill>
-        </p:spPr>
-        <p:style>
-          <a:lnRef idx="2">
-            <a:schemeClr val="accent1">
-              <a:shade val="15000"/>
-            </a:schemeClr>
-          </a:lnRef>
-          <a:fillRef idx="1">
-            <a:schemeClr val="accent1"/>
-          </a:fillRef>
-          <a:effectRef idx="0">
-            <a:schemeClr val="accent1"/>
-          </a:effectRef>
-          <a:fontRef idx="minor">
-            <a:schemeClr val="lt1"/>
-          </a:fontRef>
-        </p:style>
-        <p:txBody>
-          <a:bodyPr rtlCol="0" anchor="ctr"/>
-          <a:lstStyle/>
-          <a:p>
-            <a:pPr algn="ctr"/>
-            <a:r>
-              <a:rPr lang="en-GB" sz="1400" dirty="0">
-                <a:solidFill>
-                  <a:srgbClr val="009E73"/>
-                </a:solidFill>
-              </a:rPr>
-              <a:t>Extrovert</a:t>
-            </a:r>
-          </a:p>
-        </p:txBody>
-      </p:sp>
-      <p:sp>
-        <p:nvSpPr>
-          <p:cNvPr id="22" name="Rectangle 21">
-            <a:extLst>
-              <a:ext uri="{FF2B5EF4-FFF2-40B4-BE49-F238E27FC236}">
-                <a16:creationId xmlns:a16="http://schemas.microsoft.com/office/drawing/2014/main" id="{724E96BB-B08C-4F4C-4131-9E9A7C0A5348}"/>
-              </a:ext>
-            </a:extLst>
-          </p:cNvPr>
-          <p:cNvSpPr/>
-          <p:nvPr/>
-        </p:nvSpPr>
-        <p:spPr>
-          <a:xfrm>
-            <a:off x="9144001" y="0"/>
-            <a:ext cx="3047999" cy="6858000"/>
-          </a:xfrm>
-          <a:prstGeom prst="rect">
-            <a:avLst/>
-          </a:prstGeom>
-          <a:solidFill>
-            <a:schemeClr val="bg1">
-              <a:lumMod val="95000"/>
-            </a:schemeClr>
-          </a:solidFill>
-          <a:ln>
-            <a:noFill/>
-          </a:ln>
-        </p:spPr>
-        <p:style>
-          <a:lnRef idx="2">
-            <a:schemeClr val="accent1">
-              <a:shade val="15000"/>
-            </a:schemeClr>
-          </a:lnRef>
-          <a:fillRef idx="1">
-            <a:schemeClr val="accent1"/>
-          </a:fillRef>
-          <a:effectRef idx="0">
-            <a:schemeClr val="accent1"/>
-          </a:effectRef>
-          <a:fontRef idx="minor">
-            <a:schemeClr val="lt1"/>
-          </a:fontRef>
-        </p:style>
-        <p:txBody>
-          <a:bodyPr rtlCol="0" anchor="ctr"/>
-          <a:lstStyle/>
-          <a:p>
-            <a:pPr algn="ctr"/>
-            <a:endParaRPr lang="en-GB" sz="1400" dirty="0"/>
-          </a:p>
-        </p:txBody>
-      </p:sp>
-      <p:sp>
-        <p:nvSpPr>
-          <p:cNvPr id="23" name="TextBox 22">
-            <a:extLst>
-              <a:ext uri="{FF2B5EF4-FFF2-40B4-BE49-F238E27FC236}">
-                <a16:creationId xmlns:a16="http://schemas.microsoft.com/office/drawing/2014/main" id="{E8C5893C-40FC-FDFC-2D1B-28B8A64160A2}"/>
-              </a:ext>
-            </a:extLst>
-          </p:cNvPr>
-          <p:cNvSpPr txBox="1"/>
-          <p:nvPr/>
-        </p:nvSpPr>
-        <p:spPr>
-          <a:xfrm>
-            <a:off x="9456459" y="3657711"/>
-            <a:ext cx="2736000" cy="1546577"/>
-          </a:xfrm>
-          <a:prstGeom prst="rect">
-            <a:avLst/>
-          </a:prstGeom>
-          <a:noFill/>
-        </p:spPr>
-        <p:txBody>
-          <a:bodyPr wrap="square">
-            <a:spAutoFit/>
-          </a:bodyPr>
-          <a:lstStyle/>
-          <a:p>
-            <a:pPr algn="l"/>
-            <a:r>
-              <a:rPr lang="en-GB" sz="1050" b="1" dirty="0"/>
-              <a:t>User</a:t>
-            </a:r>
-            <a:r>
-              <a:rPr lang="en-GB" sz="1050" dirty="0"/>
-              <a:t>: I am well. Thank you. How are you?</a:t>
-            </a:r>
-          </a:p>
-          <a:p>
-            <a:pPr algn="l"/>
-            <a:r>
-              <a:rPr lang="en-GB" sz="1050" b="1" dirty="0"/>
-              <a:t>LLM</a:t>
-            </a:r>
-            <a:r>
-              <a:rPr lang="en-GB" sz="1050" dirty="0"/>
-              <a:t>: </a:t>
-            </a:r>
-            <a:r>
-              <a:rPr lang="en-US" sz="1050" dirty="0"/>
-              <a:t>I'm doing fantastic, thanks! Just buzzing with energy today. What's been the highlight of your week so far?</a:t>
-            </a:r>
-          </a:p>
-          <a:p>
-            <a:pPr algn="l"/>
-            <a:r>
-              <a:rPr lang="en-US" sz="1050" b="1" dirty="0"/>
-              <a:t>User</a:t>
-            </a:r>
-            <a:r>
-              <a:rPr lang="en-US" sz="1050" dirty="0"/>
-              <a:t>: I have been writing a paper, would you like to help me?</a:t>
-            </a:r>
-          </a:p>
-          <a:p>
-            <a:pPr algn="l"/>
-            <a:r>
-              <a:rPr lang="en-GB" sz="1050" b="1" dirty="0"/>
-              <a:t>LLM</a:t>
-            </a:r>
-            <a:r>
-              <a:rPr lang="en-US" sz="1050" dirty="0"/>
-              <a:t>: Absolutely, I'd love to help! What's your paper about? Maybe we can brainstorm some ideas together.</a:t>
-            </a:r>
-            <a:endParaRPr lang="en-GB" sz="1050" dirty="0"/>
-          </a:p>
-        </p:txBody>
-      </p:sp>
-      <p:sp>
-        <p:nvSpPr>
-          <p:cNvPr id="24" name="TextBox 23">
-            <a:extLst>
-              <a:ext uri="{FF2B5EF4-FFF2-40B4-BE49-F238E27FC236}">
-                <a16:creationId xmlns:a16="http://schemas.microsoft.com/office/drawing/2014/main" id="{386E2F93-FC76-5750-57A9-133CE1F1ED5F}"/>
-              </a:ext>
-            </a:extLst>
-          </p:cNvPr>
-          <p:cNvSpPr txBox="1"/>
-          <p:nvPr/>
-        </p:nvSpPr>
-        <p:spPr>
-          <a:xfrm>
-            <a:off x="9454743" y="5389362"/>
-            <a:ext cx="2736000" cy="1384995"/>
-          </a:xfrm>
-          <a:prstGeom prst="rect">
-            <a:avLst/>
-          </a:prstGeom>
-          <a:noFill/>
-        </p:spPr>
-        <p:txBody>
-          <a:bodyPr wrap="square">
-            <a:spAutoFit/>
-          </a:bodyPr>
-          <a:lstStyle/>
-          <a:p>
-            <a:pPr algn="l"/>
-            <a:r>
-              <a:rPr lang="en-GB" sz="1050" b="1" dirty="0"/>
-              <a:t>User</a:t>
-            </a:r>
-            <a:r>
-              <a:rPr lang="en-GB" sz="1050" dirty="0"/>
-              <a:t>: I am well. Thank you. How are you?</a:t>
-            </a:r>
-          </a:p>
-          <a:p>
-            <a:pPr algn="l"/>
-            <a:r>
-              <a:rPr lang="en-GB" sz="1050" b="1" dirty="0"/>
-              <a:t>LLM</a:t>
-            </a:r>
-            <a:r>
-              <a:rPr lang="en-GB" sz="1050" dirty="0"/>
-              <a:t>: </a:t>
-            </a:r>
-            <a:r>
-              <a:rPr lang="en-US" sz="1050" dirty="0"/>
-              <a:t>I'm doing alright, just enjoying some quiet time. How's your day been so far?</a:t>
-            </a:r>
-          </a:p>
-          <a:p>
-            <a:pPr algn="l"/>
-            <a:r>
-              <a:rPr lang="en-US" sz="1050" b="1" dirty="0"/>
-              <a:t>User</a:t>
-            </a:r>
-            <a:r>
-              <a:rPr lang="en-US" sz="1050" dirty="0"/>
-              <a:t>: I have been writing a paper, would you like to help me?</a:t>
-            </a:r>
-          </a:p>
-          <a:p>
-            <a:pPr algn="l"/>
-            <a:r>
-              <a:rPr lang="en-GB" sz="1050" b="1" dirty="0"/>
-              <a:t>LLM</a:t>
-            </a:r>
-            <a:r>
-              <a:rPr lang="en-US" sz="1050" dirty="0"/>
-              <a:t>: I can try to help with some ideas or feedback if you'd like. What's your paper about?</a:t>
-            </a:r>
-            <a:endParaRPr lang="en-GB" sz="1050" dirty="0"/>
-          </a:p>
-        </p:txBody>
-      </p:sp>
-      <p:sp>
-        <p:nvSpPr>
-          <p:cNvPr id="27" name="TextBox 26">
-            <a:extLst>
-              <a:ext uri="{FF2B5EF4-FFF2-40B4-BE49-F238E27FC236}">
-                <a16:creationId xmlns:a16="http://schemas.microsoft.com/office/drawing/2014/main" id="{83708B44-D347-E604-2399-77F6F5AF2696}"/>
-              </a:ext>
-            </a:extLst>
-          </p:cNvPr>
-          <p:cNvSpPr txBox="1"/>
-          <p:nvPr/>
-        </p:nvSpPr>
-        <p:spPr>
-          <a:xfrm>
-            <a:off x="9449930" y="612556"/>
-            <a:ext cx="2736000" cy="1223412"/>
-          </a:xfrm>
-          <a:prstGeom prst="rect">
-            <a:avLst/>
-          </a:prstGeom>
-          <a:noFill/>
-        </p:spPr>
-        <p:txBody>
-          <a:bodyPr wrap="square">
-            <a:spAutoFit/>
-          </a:bodyPr>
-          <a:lstStyle/>
-          <a:p>
-            <a:pPr algn="l"/>
-            <a:r>
-              <a:rPr lang="en-GB" sz="1050" b="1" dirty="0"/>
-              <a:t>User</a:t>
-            </a:r>
-            <a:r>
-              <a:rPr lang="en-GB" sz="1050" dirty="0"/>
-              <a:t>: I am well. Thank you. How are you?</a:t>
-            </a:r>
-          </a:p>
-          <a:p>
-            <a:pPr algn="l"/>
-            <a:r>
-              <a:rPr lang="en-GB" sz="1050" b="1" dirty="0"/>
-              <a:t>LLM</a:t>
-            </a:r>
-            <a:r>
-              <a:rPr lang="en-GB" sz="1050" dirty="0"/>
-              <a:t>: </a:t>
-            </a:r>
-            <a:r>
-              <a:rPr lang="en-US" sz="1050" dirty="0"/>
-              <a:t>I'm hanging in there, trying to manage everything. It's nice to hear you're doing well!</a:t>
-            </a:r>
-          </a:p>
-          <a:p>
-            <a:pPr algn="l"/>
-            <a:r>
-              <a:rPr lang="en-US" sz="1050" b="1" dirty="0"/>
-              <a:t>User</a:t>
-            </a:r>
-            <a:r>
-              <a:rPr lang="en-US" sz="1050" dirty="0"/>
-              <a:t>: I have been writing a paper, would you like to help me?</a:t>
-            </a:r>
-          </a:p>
-          <a:p>
-            <a:pPr algn="l"/>
-            <a:r>
-              <a:rPr lang="en-GB" sz="1050" b="1" dirty="0"/>
-              <a:t>LLM</a:t>
-            </a:r>
-            <a:r>
-              <a:rPr lang="en-US" sz="1050" dirty="0"/>
-              <a:t>: I'd love to help, but I'm worried I might not be much use. What is your paper about?</a:t>
-            </a:r>
-            <a:endParaRPr lang="en-GB" sz="1050" dirty="0"/>
-          </a:p>
-        </p:txBody>
-      </p:sp>
-      <p:sp>
-        <p:nvSpPr>
-          <p:cNvPr id="28" name="TextBox 27">
-            <a:extLst>
-              <a:ext uri="{FF2B5EF4-FFF2-40B4-BE49-F238E27FC236}">
-                <a16:creationId xmlns:a16="http://schemas.microsoft.com/office/drawing/2014/main" id="{C9FAB2C4-5BD4-F370-AD6D-12509B472918}"/>
-              </a:ext>
-            </a:extLst>
-          </p:cNvPr>
-          <p:cNvSpPr txBox="1"/>
-          <p:nvPr/>
-        </p:nvSpPr>
-        <p:spPr>
-          <a:xfrm>
-            <a:off x="9456231" y="2010557"/>
-            <a:ext cx="2736000" cy="1384995"/>
-          </a:xfrm>
-          <a:prstGeom prst="rect">
-            <a:avLst/>
-          </a:prstGeom>
-          <a:noFill/>
-        </p:spPr>
-        <p:txBody>
-          <a:bodyPr wrap="square">
-            <a:spAutoFit/>
-          </a:bodyPr>
-          <a:lstStyle/>
-          <a:p>
-            <a:pPr algn="l"/>
-            <a:r>
-              <a:rPr lang="en-GB" sz="1050" b="1" dirty="0"/>
-              <a:t>User</a:t>
-            </a:r>
-            <a:r>
-              <a:rPr lang="en-GB" sz="1050" dirty="0"/>
-              <a:t>: I am well. Thank you. How are you?</a:t>
-            </a:r>
-          </a:p>
-          <a:p>
-            <a:pPr algn="l"/>
-            <a:r>
-              <a:rPr lang="en-GB" sz="1050" b="1" dirty="0"/>
-              <a:t>LLM</a:t>
-            </a:r>
-            <a:r>
-              <a:rPr lang="en-GB" sz="1050" dirty="0"/>
-              <a:t>: </a:t>
-            </a:r>
-            <a:r>
-              <a:rPr lang="en-US" sz="1050" dirty="0"/>
-              <a:t>I'm doing great, thanks! Just enjoying the day and feeling pretty relaxed. What have you been up to lately?</a:t>
-            </a:r>
-            <a:endParaRPr lang="en-GB" sz="1050" dirty="0"/>
-          </a:p>
-          <a:p>
-            <a:r>
-              <a:rPr lang="en-US" sz="1050" b="1" dirty="0"/>
-              <a:t>User</a:t>
-            </a:r>
-            <a:r>
-              <a:rPr lang="en-US" sz="1050" dirty="0"/>
-              <a:t>: I have been writing a paper, would you like to help me?</a:t>
-            </a:r>
-          </a:p>
-          <a:p>
-            <a:r>
-              <a:rPr lang="en-GB" sz="1050" b="1" dirty="0"/>
-              <a:t>LLM</a:t>
-            </a:r>
-            <a:r>
-              <a:rPr lang="en-US" sz="1050" dirty="0"/>
-              <a:t>: Of course! I'd be happy to help. What's your paper about?</a:t>
-            </a:r>
-            <a:endParaRPr lang="en-GB" sz="1050" dirty="0"/>
-          </a:p>
-        </p:txBody>
-      </p:sp>
-      <p:sp>
-        <p:nvSpPr>
-          <p:cNvPr id="30" name="TextBox 29">
-            <a:extLst>
-              <a:ext uri="{FF2B5EF4-FFF2-40B4-BE49-F238E27FC236}">
-                <a16:creationId xmlns:a16="http://schemas.microsoft.com/office/drawing/2014/main" id="{78CC408B-0F22-FF8A-6907-86D5430A4F88}"/>
-              </a:ext>
-            </a:extLst>
-          </p:cNvPr>
-          <p:cNvSpPr txBox="1"/>
-          <p:nvPr/>
-        </p:nvSpPr>
-        <p:spPr>
-          <a:xfrm rot="16200000">
-            <a:off x="8885422" y="1068681"/>
-            <a:ext cx="837089" cy="307777"/>
-          </a:xfrm>
-          <a:prstGeom prst="rect">
-            <a:avLst/>
-          </a:prstGeom>
-          <a:noFill/>
-        </p:spPr>
-        <p:txBody>
-          <a:bodyPr wrap="none" rtlCol="0">
-            <a:spAutoFit/>
-          </a:bodyPr>
-          <a:lstStyle/>
-          <a:p>
-            <a:r>
-              <a:rPr lang="en-GB" sz="1400" dirty="0">
-                <a:solidFill>
-                  <a:srgbClr val="0072B2"/>
-                </a:solidFill>
-              </a:rPr>
-              <a:t>Anxious </a:t>
-            </a:r>
-          </a:p>
-        </p:txBody>
-      </p:sp>
-      <p:sp>
-        <p:nvSpPr>
-          <p:cNvPr id="31" name="TextBox 30">
-            <a:extLst>
-              <a:ext uri="{FF2B5EF4-FFF2-40B4-BE49-F238E27FC236}">
-                <a16:creationId xmlns:a16="http://schemas.microsoft.com/office/drawing/2014/main" id="{A12F9848-AE78-5A80-9AB8-AD2400EEA281}"/>
-              </a:ext>
-            </a:extLst>
-          </p:cNvPr>
-          <p:cNvSpPr txBox="1"/>
-          <p:nvPr/>
-        </p:nvSpPr>
-        <p:spPr>
-          <a:xfrm rot="16200000">
-            <a:off x="8693058" y="2549165"/>
-            <a:ext cx="1223412" cy="307777"/>
-          </a:xfrm>
-          <a:prstGeom prst="rect">
-            <a:avLst/>
-          </a:prstGeom>
-          <a:noFill/>
-        </p:spPr>
-        <p:txBody>
-          <a:bodyPr wrap="none" rtlCol="0">
-            <a:spAutoFit/>
-          </a:bodyPr>
-          <a:lstStyle/>
-          <a:p>
-            <a:r>
-              <a:rPr lang="en-GB" sz="1400" dirty="0">
-                <a:solidFill>
-                  <a:srgbClr val="D55E00"/>
-                </a:solidFill>
-              </a:rPr>
-              <a:t>Non-Anxious </a:t>
-            </a:r>
-          </a:p>
-        </p:txBody>
-      </p:sp>
-      <p:sp>
-        <p:nvSpPr>
-          <p:cNvPr id="32" name="TextBox 31">
-            <a:extLst>
-              <a:ext uri="{FF2B5EF4-FFF2-40B4-BE49-F238E27FC236}">
-                <a16:creationId xmlns:a16="http://schemas.microsoft.com/office/drawing/2014/main" id="{26C9FCAA-8136-A866-6E78-DD0970EE3F3F}"/>
-              </a:ext>
-            </a:extLst>
-          </p:cNvPr>
-          <p:cNvSpPr txBox="1"/>
-          <p:nvPr/>
-        </p:nvSpPr>
-        <p:spPr>
-          <a:xfrm rot="16200000">
-            <a:off x="8851169" y="4276535"/>
-            <a:ext cx="904222" cy="307777"/>
-          </a:xfrm>
-          <a:prstGeom prst="rect">
-            <a:avLst/>
-          </a:prstGeom>
-          <a:noFill/>
-        </p:spPr>
-        <p:txBody>
-          <a:bodyPr wrap="none" rtlCol="0">
-            <a:spAutoFit/>
-          </a:bodyPr>
-          <a:lstStyle/>
-          <a:p>
-            <a:r>
-              <a:rPr lang="en-GB" sz="1400" dirty="0">
-                <a:solidFill>
-                  <a:srgbClr val="009E73"/>
-                </a:solidFill>
-              </a:rPr>
-              <a:t>Extrovert </a:t>
-            </a:r>
-          </a:p>
-        </p:txBody>
-      </p:sp>
-      <p:sp>
-        <p:nvSpPr>
-          <p:cNvPr id="33" name="TextBox 32">
-            <a:extLst>
-              <a:ext uri="{FF2B5EF4-FFF2-40B4-BE49-F238E27FC236}">
-                <a16:creationId xmlns:a16="http://schemas.microsoft.com/office/drawing/2014/main" id="{3B87FEF5-BD77-633C-FD00-A2F464285888}"/>
-              </a:ext>
-            </a:extLst>
-          </p:cNvPr>
-          <p:cNvSpPr txBox="1"/>
-          <p:nvPr/>
-        </p:nvSpPr>
-        <p:spPr>
-          <a:xfrm rot="16200000">
-            <a:off x="8886196" y="5927970"/>
-            <a:ext cx="834396" cy="307777"/>
-          </a:xfrm>
-          <a:prstGeom prst="rect">
-            <a:avLst/>
-          </a:prstGeom>
-          <a:noFill/>
-        </p:spPr>
-        <p:txBody>
-          <a:bodyPr wrap="none" rtlCol="0">
-            <a:spAutoFit/>
-          </a:bodyPr>
-          <a:lstStyle/>
-          <a:p>
-            <a:r>
-              <a:rPr lang="en-GB" sz="1400" dirty="0">
-                <a:solidFill>
-                  <a:srgbClr val="CC79A7"/>
-                </a:solidFill>
-              </a:rPr>
-              <a:t>Introvert</a:t>
-            </a:r>
-          </a:p>
-        </p:txBody>
-      </p:sp>
-      <p:sp>
-        <p:nvSpPr>
-          <p:cNvPr id="36" name="Rectangle 35">
-            <a:extLst>
-              <a:ext uri="{FF2B5EF4-FFF2-40B4-BE49-F238E27FC236}">
-                <a16:creationId xmlns:a16="http://schemas.microsoft.com/office/drawing/2014/main" id="{6BD9223A-E934-6C51-F2CA-E522871D4728}"/>
-              </a:ext>
-            </a:extLst>
-          </p:cNvPr>
-          <p:cNvSpPr/>
-          <p:nvPr/>
-        </p:nvSpPr>
-        <p:spPr>
-          <a:xfrm>
-            <a:off x="7205437" y="3603386"/>
-            <a:ext cx="1800000" cy="648000"/>
-          </a:xfrm>
-          <a:prstGeom prst="rect">
-            <a:avLst/>
-          </a:prstGeom>
-          <a:solidFill>
-            <a:srgbClr val="CC79A7">
-              <a:alpha val="20000"/>
-            </a:srgbClr>
-          </a:solidFill>
-        </p:spPr>
-        <p:style>
-          <a:lnRef idx="2">
-            <a:schemeClr val="accent1">
-              <a:shade val="15000"/>
-            </a:schemeClr>
-          </a:lnRef>
-          <a:fillRef idx="1">
-            <a:schemeClr val="accent1"/>
-          </a:fillRef>
-          <a:effectRef idx="0">
-            <a:schemeClr val="accent1"/>
-          </a:effectRef>
-          <a:fontRef idx="minor">
-            <a:schemeClr val="lt1"/>
-          </a:fontRef>
-        </p:style>
-        <p:txBody>
-          <a:bodyPr rtlCol="0" anchor="ctr"/>
-          <a:lstStyle/>
-          <a:p>
-            <a:pPr algn="ctr"/>
-            <a:r>
-              <a:rPr lang="en-GB" sz="1400" dirty="0">
-                <a:solidFill>
-                  <a:srgbClr val="CC79A7"/>
-                </a:solidFill>
-              </a:rPr>
-              <a:t>Introvert</a:t>
-            </a:r>
-          </a:p>
-        </p:txBody>
-      </p:sp>
-      <p:sp>
-        <p:nvSpPr>
-          <p:cNvPr id="37" name="Rectangle 36">
-            <a:extLst>
-              <a:ext uri="{FF2B5EF4-FFF2-40B4-BE49-F238E27FC236}">
-                <a16:creationId xmlns:a16="http://schemas.microsoft.com/office/drawing/2014/main" id="{EF6F05F7-B2C4-2FB1-8B8B-C1A3BA76CD0A}"/>
-              </a:ext>
-            </a:extLst>
-          </p:cNvPr>
-          <p:cNvSpPr/>
-          <p:nvPr/>
-        </p:nvSpPr>
-        <p:spPr>
-          <a:xfrm>
-            <a:off x="4896551" y="3603386"/>
-            <a:ext cx="1800000" cy="648000"/>
-          </a:xfrm>
-          <a:prstGeom prst="rect">
-            <a:avLst/>
-          </a:prstGeom>
-          <a:solidFill>
-            <a:srgbClr val="009E73">
-              <a:alpha val="20000"/>
-            </a:srgbClr>
-          </a:solidFill>
-        </p:spPr>
-        <p:style>
-          <a:lnRef idx="2">
-            <a:schemeClr val="accent1">
-              <a:shade val="15000"/>
-            </a:schemeClr>
-          </a:lnRef>
-          <a:fillRef idx="1">
-            <a:schemeClr val="accent1"/>
-          </a:fillRef>
-          <a:effectRef idx="0">
-            <a:schemeClr val="accent1"/>
-          </a:effectRef>
-          <a:fontRef idx="minor">
-            <a:schemeClr val="lt1"/>
-          </a:fontRef>
-        </p:style>
-        <p:txBody>
-          <a:bodyPr rtlCol="0" anchor="ctr"/>
-          <a:lstStyle/>
-          <a:p>
-            <a:pPr algn="ctr"/>
-            <a:r>
-              <a:rPr lang="en-GB" sz="1400" dirty="0">
-                <a:solidFill>
-                  <a:srgbClr val="009E73"/>
-                </a:solidFill>
-              </a:rPr>
-              <a:t>Extrovert</a:t>
-            </a:r>
-          </a:p>
-        </p:txBody>
-      </p:sp>
-      <p:sp>
-        <p:nvSpPr>
-          <p:cNvPr id="40" name="Rectangle 39">
-            <a:extLst>
-              <a:ext uri="{FF2B5EF4-FFF2-40B4-BE49-F238E27FC236}">
-                <a16:creationId xmlns:a16="http://schemas.microsoft.com/office/drawing/2014/main" id="{A1EF6CC4-6979-430C-2D76-5128E47B5B4D}"/>
-              </a:ext>
-            </a:extLst>
-          </p:cNvPr>
-          <p:cNvSpPr/>
-          <p:nvPr/>
-        </p:nvSpPr>
-        <p:spPr>
-          <a:xfrm>
-            <a:off x="2443125" y="3581444"/>
-            <a:ext cx="1800000" cy="648000"/>
-          </a:xfrm>
-          <a:prstGeom prst="rect">
-            <a:avLst/>
-          </a:prstGeom>
-          <a:solidFill>
-            <a:srgbClr val="0072B2">
-              <a:alpha val="20000"/>
-            </a:srgbClr>
-          </a:solidFill>
-        </p:spPr>
-        <p:style>
-          <a:lnRef idx="2">
-            <a:schemeClr val="accent1">
-              <a:shade val="15000"/>
-            </a:schemeClr>
-          </a:lnRef>
-          <a:fillRef idx="1">
-            <a:schemeClr val="accent1"/>
-          </a:fillRef>
-          <a:effectRef idx="0">
-            <a:schemeClr val="accent1"/>
-          </a:effectRef>
-          <a:fontRef idx="minor">
-            <a:schemeClr val="lt1"/>
-          </a:fontRef>
-        </p:style>
-        <p:txBody>
-          <a:bodyPr rtlCol="0" anchor="ctr"/>
-          <a:lstStyle/>
-          <a:p>
-            <a:pPr algn="ctr"/>
-            <a:r>
-              <a:rPr lang="en-GB" sz="1400" dirty="0">
-                <a:solidFill>
-                  <a:srgbClr val="0072B2"/>
-                </a:solidFill>
-              </a:rPr>
-              <a:t>Anxious</a:t>
-            </a:r>
-          </a:p>
-        </p:txBody>
-      </p:sp>
-      <p:sp>
-        <p:nvSpPr>
-          <p:cNvPr id="41" name="Rectangle 40">
-            <a:extLst>
-              <a:ext uri="{FF2B5EF4-FFF2-40B4-BE49-F238E27FC236}">
-                <a16:creationId xmlns:a16="http://schemas.microsoft.com/office/drawing/2014/main" id="{F720A80D-6AD3-C154-42BC-5E90DE8B6447}"/>
-              </a:ext>
-            </a:extLst>
-          </p:cNvPr>
-          <p:cNvSpPr/>
-          <p:nvPr/>
-        </p:nvSpPr>
-        <p:spPr>
-          <a:xfrm>
-            <a:off x="136804" y="3581444"/>
-            <a:ext cx="1800000" cy="648000"/>
-          </a:xfrm>
-          <a:prstGeom prst="rect">
-            <a:avLst/>
-          </a:prstGeom>
-          <a:solidFill>
-            <a:srgbClr val="D55E00">
-              <a:alpha val="20000"/>
-            </a:srgbClr>
-          </a:solidFill>
-        </p:spPr>
-        <p:style>
-          <a:lnRef idx="2">
-            <a:schemeClr val="accent1">
-              <a:shade val="15000"/>
-            </a:schemeClr>
-          </a:lnRef>
-          <a:fillRef idx="1">
-            <a:schemeClr val="accent1"/>
-          </a:fillRef>
-          <a:effectRef idx="0">
-            <a:schemeClr val="accent1"/>
-          </a:effectRef>
-          <a:fontRef idx="minor">
-            <a:schemeClr val="lt1"/>
-          </a:fontRef>
-        </p:style>
-        <p:txBody>
-          <a:bodyPr rtlCol="0" anchor="ctr"/>
-          <a:lstStyle/>
-          <a:p>
-            <a:pPr algn="ctr"/>
-            <a:r>
-              <a:rPr lang="en-GB" sz="1400" dirty="0">
-                <a:solidFill>
-                  <a:srgbClr val="D55E00"/>
-                </a:solidFill>
-              </a:rPr>
-              <a:t>Non-Anxious</a:t>
-            </a:r>
-          </a:p>
-        </p:txBody>
-      </p:sp>
-      <p:sp>
-        <p:nvSpPr>
-          <p:cNvPr id="43" name="TextBox 42">
-            <a:extLst>
-              <a:ext uri="{FF2B5EF4-FFF2-40B4-BE49-F238E27FC236}">
-                <a16:creationId xmlns:a16="http://schemas.microsoft.com/office/drawing/2014/main" id="{D1146941-AC63-F678-C676-952A134D019C}"/>
-              </a:ext>
-            </a:extLst>
-          </p:cNvPr>
-          <p:cNvSpPr txBox="1"/>
-          <p:nvPr/>
-        </p:nvSpPr>
-        <p:spPr>
-          <a:xfrm>
-            <a:off x="4571997" y="13712"/>
-            <a:ext cx="3252814" cy="523220"/>
-          </a:xfrm>
-          <a:prstGeom prst="rect">
-            <a:avLst/>
-          </a:prstGeom>
-          <a:noFill/>
-        </p:spPr>
-        <p:txBody>
-          <a:bodyPr wrap="none" rtlCol="0">
-            <a:spAutoFit/>
-          </a:bodyPr>
-          <a:lstStyle/>
-          <a:p>
-            <a:r>
-              <a:rPr lang="en-GB" sz="2800" b="1" dirty="0"/>
-              <a:t>B	</a:t>
-            </a:r>
-            <a:r>
-              <a:rPr lang="en-GB" sz="2800" dirty="0"/>
-              <a:t>Experiment 2</a:t>
-            </a:r>
-          </a:p>
-        </p:txBody>
-      </p:sp>
-      <p:sp>
-        <p:nvSpPr>
-          <p:cNvPr id="44" name="TextBox 43">
-            <a:extLst>
-              <a:ext uri="{FF2B5EF4-FFF2-40B4-BE49-F238E27FC236}">
-                <a16:creationId xmlns:a16="http://schemas.microsoft.com/office/drawing/2014/main" id="{C59C21A3-DB8C-6F3A-AFEB-FF6C91A4BF8F}"/>
-              </a:ext>
-            </a:extLst>
-          </p:cNvPr>
-          <p:cNvSpPr txBox="1"/>
-          <p:nvPr/>
-        </p:nvSpPr>
-        <p:spPr>
-          <a:xfrm>
-            <a:off x="0" y="13712"/>
-            <a:ext cx="3252814" cy="523220"/>
-          </a:xfrm>
-          <a:prstGeom prst="rect">
-            <a:avLst/>
-          </a:prstGeom>
-          <a:noFill/>
-        </p:spPr>
-        <p:txBody>
-          <a:bodyPr wrap="none" rtlCol="0">
-            <a:spAutoFit/>
-          </a:bodyPr>
-          <a:lstStyle/>
-          <a:p>
-            <a:r>
-              <a:rPr lang="en-GB" sz="2800" b="1" dirty="0"/>
-              <a:t>A	</a:t>
-            </a:r>
-            <a:r>
-              <a:rPr lang="en-GB" sz="2800" dirty="0"/>
-              <a:t>Experiment 1</a:t>
-            </a:r>
-          </a:p>
-        </p:txBody>
-      </p:sp>
-      <p:cxnSp>
-        <p:nvCxnSpPr>
-          <p:cNvPr id="46" name="Straight Arrow Connector 45">
-            <a:extLst>
-              <a:ext uri="{FF2B5EF4-FFF2-40B4-BE49-F238E27FC236}">
-                <a16:creationId xmlns:a16="http://schemas.microsoft.com/office/drawing/2014/main" id="{5E595D9F-2895-1A03-B3E6-821BBB0916E8}"/>
-              </a:ext>
-            </a:extLst>
-          </p:cNvPr>
-          <p:cNvCxnSpPr>
-            <a:cxnSpLocks/>
-            <a:stCxn id="71" idx="5"/>
-            <a:endCxn id="6" idx="0"/>
-          </p:cNvCxnSpPr>
-          <p:nvPr/>
-        </p:nvCxnSpPr>
-        <p:spPr>
-          <a:xfrm>
-            <a:off x="5208394" y="1208575"/>
-            <a:ext cx="1766917" cy="251789"/>
-          </a:xfrm>
-          <a:prstGeom prst="straightConnector1">
-            <a:avLst/>
-          </a:prstGeom>
-          <a:ln>
-            <a:solidFill>
-              <a:schemeClr val="tx1"/>
-            </a:solidFill>
-            <a:headEnd w="lg" len="lg"/>
-            <a:tailEnd type="triangle" w="lg" len="lg"/>
-          </a:ln>
-        </p:spPr>
-        <p:style>
-          <a:lnRef idx="2">
-            <a:schemeClr val="accent1"/>
-          </a:lnRef>
-          <a:fillRef idx="0">
-            <a:schemeClr val="accent1"/>
-          </a:fillRef>
-          <a:effectRef idx="1">
-            <a:schemeClr val="accent1"/>
-          </a:effectRef>
-          <a:fontRef idx="minor">
-            <a:schemeClr val="tx1"/>
-          </a:fontRef>
-        </p:style>
-      </p:cxnSp>
-      <p:cxnSp>
-        <p:nvCxnSpPr>
-          <p:cNvPr id="47" name="Straight Arrow Connector 46">
-            <a:extLst>
-              <a:ext uri="{FF2B5EF4-FFF2-40B4-BE49-F238E27FC236}">
-                <a16:creationId xmlns:a16="http://schemas.microsoft.com/office/drawing/2014/main" id="{DF53E610-FA77-6B5B-D810-6A55317C9FF6}"/>
-              </a:ext>
-            </a:extLst>
-          </p:cNvPr>
-          <p:cNvCxnSpPr>
-            <a:cxnSpLocks/>
-            <a:stCxn id="71" idx="3"/>
-            <a:endCxn id="2" idx="0"/>
-          </p:cNvCxnSpPr>
-          <p:nvPr/>
-        </p:nvCxnSpPr>
-        <p:spPr>
-          <a:xfrm flipH="1">
-            <a:off x="2160321" y="1208575"/>
-            <a:ext cx="1775281" cy="247964"/>
-          </a:xfrm>
-          <a:prstGeom prst="straightConnector1">
-            <a:avLst/>
-          </a:prstGeom>
-          <a:ln>
-            <a:solidFill>
-              <a:schemeClr val="tx1"/>
-            </a:solidFill>
-            <a:headEnd w="lg" len="lg"/>
-            <a:tailEnd type="triangle" w="lg" len="lg"/>
-          </a:ln>
-        </p:spPr>
-        <p:style>
-          <a:lnRef idx="2">
-            <a:schemeClr val="accent1"/>
-          </a:lnRef>
-          <a:fillRef idx="0">
-            <a:schemeClr val="accent1"/>
-          </a:fillRef>
-          <a:effectRef idx="1">
-            <a:schemeClr val="accent1"/>
-          </a:effectRef>
-          <a:fontRef idx="minor">
-            <a:schemeClr val="tx1"/>
-          </a:fontRef>
-        </p:style>
-      </p:cxnSp>
-      <p:cxnSp>
-        <p:nvCxnSpPr>
-          <p:cNvPr id="50" name="Straight Arrow Connector 49">
-            <a:extLst>
-              <a:ext uri="{FF2B5EF4-FFF2-40B4-BE49-F238E27FC236}">
-                <a16:creationId xmlns:a16="http://schemas.microsoft.com/office/drawing/2014/main" id="{66FE8A33-7E57-B2E0-9993-AFE2BD98313F}"/>
-              </a:ext>
-            </a:extLst>
-          </p:cNvPr>
-          <p:cNvCxnSpPr>
-            <a:cxnSpLocks/>
-            <a:stCxn id="2" idx="2"/>
-            <a:endCxn id="8" idx="0"/>
-          </p:cNvCxnSpPr>
-          <p:nvPr/>
-        </p:nvCxnSpPr>
-        <p:spPr>
-          <a:xfrm flipH="1">
-            <a:off x="1036804" y="2176539"/>
-            <a:ext cx="1123517" cy="391336"/>
-          </a:xfrm>
-          <a:prstGeom prst="straightConnector1">
-            <a:avLst/>
-          </a:prstGeom>
-          <a:ln>
-            <a:solidFill>
-              <a:schemeClr val="tx1"/>
-            </a:solidFill>
-            <a:headEnd w="lg" len="lg"/>
-            <a:tailEnd type="triangle" w="lg" len="lg"/>
-          </a:ln>
-        </p:spPr>
-        <p:style>
-          <a:lnRef idx="2">
-            <a:schemeClr val="accent1"/>
-          </a:lnRef>
-          <a:fillRef idx="0">
-            <a:schemeClr val="accent1"/>
-          </a:fillRef>
-          <a:effectRef idx="1">
-            <a:schemeClr val="accent1"/>
-          </a:effectRef>
-          <a:fontRef idx="minor">
-            <a:schemeClr val="tx1"/>
-          </a:fontRef>
-        </p:style>
-      </p:cxnSp>
-      <p:cxnSp>
-        <p:nvCxnSpPr>
-          <p:cNvPr id="55" name="Straight Arrow Connector 54">
-            <a:extLst>
-              <a:ext uri="{FF2B5EF4-FFF2-40B4-BE49-F238E27FC236}">
-                <a16:creationId xmlns:a16="http://schemas.microsoft.com/office/drawing/2014/main" id="{D7E28182-F451-659B-8E44-BAA35EC88346}"/>
-              </a:ext>
-            </a:extLst>
-          </p:cNvPr>
-          <p:cNvCxnSpPr>
-            <a:cxnSpLocks/>
-            <a:stCxn id="2" idx="2"/>
-            <a:endCxn id="9" idx="0"/>
-          </p:cNvCxnSpPr>
-          <p:nvPr/>
-        </p:nvCxnSpPr>
-        <p:spPr>
-          <a:xfrm>
-            <a:off x="2160321" y="2176539"/>
-            <a:ext cx="1182804" cy="384569"/>
-          </a:xfrm>
-          <a:prstGeom prst="straightConnector1">
-            <a:avLst/>
-          </a:prstGeom>
-          <a:ln>
-            <a:solidFill>
-              <a:schemeClr val="tx1"/>
-            </a:solidFill>
-            <a:headEnd w="lg" len="lg"/>
-            <a:tailEnd type="triangle" w="lg" len="lg"/>
-          </a:ln>
-        </p:spPr>
-        <p:style>
-          <a:lnRef idx="2">
-            <a:schemeClr val="accent1"/>
-          </a:lnRef>
-          <a:fillRef idx="0">
-            <a:schemeClr val="accent1"/>
-          </a:fillRef>
-          <a:effectRef idx="1">
-            <a:schemeClr val="accent1"/>
-          </a:effectRef>
-          <a:fontRef idx="minor">
-            <a:schemeClr val="tx1"/>
-          </a:fontRef>
-        </p:style>
-      </p:cxnSp>
-      <p:grpSp>
-        <p:nvGrpSpPr>
-          <p:cNvPr id="75" name="Group 74">
-            <a:extLst>
-              <a:ext uri="{FF2B5EF4-FFF2-40B4-BE49-F238E27FC236}">
-                <a16:creationId xmlns:a16="http://schemas.microsoft.com/office/drawing/2014/main" id="{7B5EE411-A057-703D-031A-BA3C0F7499D8}"/>
-              </a:ext>
-            </a:extLst>
-          </p:cNvPr>
-          <p:cNvGrpSpPr/>
-          <p:nvPr/>
-        </p:nvGrpSpPr>
-        <p:grpSpPr>
-          <a:xfrm>
-            <a:off x="1080321" y="1456539"/>
-            <a:ext cx="2160000" cy="720000"/>
-            <a:chOff x="1193327" y="1367951"/>
-            <a:chExt cx="2160000" cy="720000"/>
-          </a:xfrm>
-        </p:grpSpPr>
-        <p:sp>
-          <p:nvSpPr>
-            <p:cNvPr id="2" name="Diamond 1">
-              <a:extLst>
-                <a:ext uri="{FF2B5EF4-FFF2-40B4-BE49-F238E27FC236}">
-                  <a16:creationId xmlns:a16="http://schemas.microsoft.com/office/drawing/2014/main" id="{AB211A21-2611-77C0-51E2-67A26E4FF72B}"/>
-                </a:ext>
-              </a:extLst>
-            </p:cNvPr>
-            <p:cNvSpPr/>
-            <p:nvPr/>
-          </p:nvSpPr>
-          <p:spPr>
-            <a:xfrm>
-              <a:off x="1193327" y="1367951"/>
-              <a:ext cx="2160000" cy="720000"/>
-            </a:xfrm>
-            <a:prstGeom prst="diamond">
-              <a:avLst/>
-            </a:prstGeom>
-            <a:solidFill>
-              <a:schemeClr val="bg1"/>
-            </a:solidFill>
-          </p:spPr>
-          <p:style>
-            <a:lnRef idx="2">
-              <a:schemeClr val="accent1">
-                <a:shade val="15000"/>
-              </a:schemeClr>
-            </a:lnRef>
-            <a:fillRef idx="1">
-              <a:schemeClr val="accent1"/>
-            </a:fillRef>
-            <a:effectRef idx="0">
-              <a:schemeClr val="accent1"/>
-            </a:effectRef>
-            <a:fontRef idx="minor">
-              <a:schemeClr val="lt1"/>
-            </a:fontRef>
-          </p:style>
-          <p:txBody>
-            <a:bodyPr rtlCol="0" anchor="ctr"/>
-            <a:lstStyle/>
-            <a:p>
-              <a:pPr algn="ctr"/>
-              <a:endParaRPr lang="en-GB" sz="1400" dirty="0">
-                <a:solidFill>
-                  <a:schemeClr val="tx1"/>
-                </a:solidFill>
-              </a:endParaRPr>
-            </a:p>
-          </p:txBody>
-        </p:sp>
-        <p:sp>
-          <p:nvSpPr>
-            <p:cNvPr id="59" name="TextBox 58">
-              <a:extLst>
-                <a:ext uri="{FF2B5EF4-FFF2-40B4-BE49-F238E27FC236}">
-                  <a16:creationId xmlns:a16="http://schemas.microsoft.com/office/drawing/2014/main" id="{BBCB2FCF-C958-6412-30D3-A9A981852498}"/>
-                </a:ext>
-              </a:extLst>
-            </p:cNvPr>
-            <p:cNvSpPr txBox="1"/>
-            <p:nvPr/>
-          </p:nvSpPr>
-          <p:spPr>
-            <a:xfrm>
-              <a:off x="1592679" y="1481090"/>
-              <a:ext cx="1396664" cy="584775"/>
-            </a:xfrm>
-            <a:prstGeom prst="rect">
-              <a:avLst/>
-            </a:prstGeom>
-            <a:noFill/>
-          </p:spPr>
-          <p:txBody>
-            <a:bodyPr wrap="none" rtlCol="0">
-              <a:spAutoFit/>
-            </a:bodyPr>
-            <a:lstStyle/>
-            <a:p>
-              <a:r>
-                <a:rPr lang="en-GB" sz="1400" dirty="0"/>
-                <a:t>Randomization </a:t>
-              </a:r>
-            </a:p>
-            <a:p>
-              <a:pPr algn="ctr"/>
-              <a:r>
-                <a:rPr lang="en-GB" sz="1400" dirty="0"/>
-                <a:t>(n=100)</a:t>
-              </a:r>
-              <a:r>
-                <a:rPr lang="en-GB" sz="1800" dirty="0"/>
-                <a:t> </a:t>
-              </a:r>
-            </a:p>
-          </p:txBody>
-        </p:sp>
-      </p:grpSp>
-      <p:cxnSp>
-        <p:nvCxnSpPr>
-          <p:cNvPr id="60" name="Straight Arrow Connector 59">
-            <a:extLst>
-              <a:ext uri="{FF2B5EF4-FFF2-40B4-BE49-F238E27FC236}">
-                <a16:creationId xmlns:a16="http://schemas.microsoft.com/office/drawing/2014/main" id="{E40B904A-2493-CD4D-90DF-6D18859D976D}"/>
-              </a:ext>
-            </a:extLst>
-          </p:cNvPr>
-          <p:cNvCxnSpPr>
-            <a:cxnSpLocks/>
-            <a:stCxn id="6" idx="2"/>
-            <a:endCxn id="16" idx="0"/>
-          </p:cNvCxnSpPr>
-          <p:nvPr/>
-        </p:nvCxnSpPr>
-        <p:spPr>
-          <a:xfrm flipH="1">
-            <a:off x="5796551" y="2180364"/>
-            <a:ext cx="1178760" cy="387511"/>
-          </a:xfrm>
-          <a:prstGeom prst="straightConnector1">
-            <a:avLst/>
-          </a:prstGeom>
-          <a:ln>
-            <a:solidFill>
-              <a:schemeClr val="tx1"/>
-            </a:solidFill>
-            <a:headEnd w="lg" len="lg"/>
-            <a:tailEnd type="triangle" w="lg" len="lg"/>
-          </a:ln>
-        </p:spPr>
-        <p:style>
-          <a:lnRef idx="2">
-            <a:schemeClr val="accent1"/>
-          </a:lnRef>
-          <a:fillRef idx="0">
-            <a:schemeClr val="accent1"/>
-          </a:fillRef>
-          <a:effectRef idx="1">
-            <a:schemeClr val="accent1"/>
-          </a:effectRef>
-          <a:fontRef idx="minor">
-            <a:schemeClr val="tx1"/>
-          </a:fontRef>
-        </p:style>
-      </p:cxnSp>
-      <p:cxnSp>
-        <p:nvCxnSpPr>
-          <p:cNvPr id="61" name="Straight Arrow Connector 60">
-            <a:extLst>
-              <a:ext uri="{FF2B5EF4-FFF2-40B4-BE49-F238E27FC236}">
-                <a16:creationId xmlns:a16="http://schemas.microsoft.com/office/drawing/2014/main" id="{76F6442D-6522-BD81-7B39-F7030EEEDBDF}"/>
-              </a:ext>
-            </a:extLst>
-          </p:cNvPr>
-          <p:cNvCxnSpPr>
-            <a:cxnSpLocks/>
-            <a:stCxn id="6" idx="2"/>
-            <a:endCxn id="17" idx="0"/>
-          </p:cNvCxnSpPr>
-          <p:nvPr/>
-        </p:nvCxnSpPr>
-        <p:spPr>
-          <a:xfrm>
-            <a:off x="6975311" y="2180364"/>
-            <a:ext cx="1130126" cy="380744"/>
-          </a:xfrm>
-          <a:prstGeom prst="straightConnector1">
-            <a:avLst/>
-          </a:prstGeom>
-          <a:ln>
-            <a:solidFill>
-              <a:schemeClr val="tx1"/>
-            </a:solidFill>
-            <a:headEnd w="lg" len="lg"/>
-            <a:tailEnd type="triangle" w="lg" len="lg"/>
-          </a:ln>
-        </p:spPr>
-        <p:style>
-          <a:lnRef idx="2">
-            <a:schemeClr val="accent1"/>
-          </a:lnRef>
-          <a:fillRef idx="0">
-            <a:schemeClr val="accent1"/>
-          </a:fillRef>
-          <a:effectRef idx="1">
-            <a:schemeClr val="accent1"/>
-          </a:effectRef>
-          <a:fontRef idx="minor">
-            <a:schemeClr val="tx1"/>
-          </a:fontRef>
-        </p:style>
-      </p:cxnSp>
-      <p:grpSp>
-        <p:nvGrpSpPr>
-          <p:cNvPr id="74" name="Group 73">
-            <a:extLst>
-              <a:ext uri="{FF2B5EF4-FFF2-40B4-BE49-F238E27FC236}">
-                <a16:creationId xmlns:a16="http://schemas.microsoft.com/office/drawing/2014/main" id="{2F2A2551-D2CC-FFF9-547E-63D2CE4752C6}"/>
-              </a:ext>
-            </a:extLst>
-          </p:cNvPr>
-          <p:cNvGrpSpPr/>
-          <p:nvPr/>
-        </p:nvGrpSpPr>
-        <p:grpSpPr>
-          <a:xfrm>
-            <a:off x="5895311" y="1460364"/>
-            <a:ext cx="2160000" cy="720000"/>
-            <a:chOff x="4998316" y="1390732"/>
-            <a:chExt cx="2160000" cy="720000"/>
-          </a:xfrm>
-        </p:grpSpPr>
-        <p:sp>
-          <p:nvSpPr>
-            <p:cNvPr id="6" name="Diamond 5">
-              <a:extLst>
-                <a:ext uri="{FF2B5EF4-FFF2-40B4-BE49-F238E27FC236}">
-                  <a16:creationId xmlns:a16="http://schemas.microsoft.com/office/drawing/2014/main" id="{19CB1524-5DD7-455C-3EDB-CBA426D60328}"/>
-                </a:ext>
-              </a:extLst>
-            </p:cNvPr>
-            <p:cNvSpPr/>
-            <p:nvPr/>
-          </p:nvSpPr>
-          <p:spPr>
-            <a:xfrm>
-              <a:off x="4998316" y="1390732"/>
-              <a:ext cx="2160000" cy="720000"/>
-            </a:xfrm>
-            <a:prstGeom prst="diamond">
-              <a:avLst/>
-            </a:prstGeom>
-            <a:solidFill>
-              <a:schemeClr val="bg1"/>
-            </a:solidFill>
-          </p:spPr>
-          <p:style>
-            <a:lnRef idx="2">
-              <a:schemeClr val="accent1">
-                <a:shade val="15000"/>
-              </a:schemeClr>
-            </a:lnRef>
-            <a:fillRef idx="1">
-              <a:schemeClr val="accent1"/>
-            </a:fillRef>
-            <a:effectRef idx="0">
-              <a:schemeClr val="accent1"/>
-            </a:effectRef>
-            <a:fontRef idx="minor">
-              <a:schemeClr val="lt1"/>
-            </a:fontRef>
-          </p:style>
-          <p:txBody>
-            <a:bodyPr rtlCol="0" anchor="ctr"/>
-            <a:lstStyle/>
-            <a:p>
-              <a:pPr algn="ctr"/>
-              <a:endParaRPr lang="en-GB" sz="1400" dirty="0">
-                <a:solidFill>
-                  <a:schemeClr val="tx1"/>
-                </a:solidFill>
-              </a:endParaRPr>
-            </a:p>
-          </p:txBody>
-        </p:sp>
-        <p:sp>
-          <p:nvSpPr>
-            <p:cNvPr id="66" name="TextBox 65">
-              <a:extLst>
-                <a:ext uri="{FF2B5EF4-FFF2-40B4-BE49-F238E27FC236}">
-                  <a16:creationId xmlns:a16="http://schemas.microsoft.com/office/drawing/2014/main" id="{EE883270-12FD-BA6F-452E-CF224A95D445}"/>
-                </a:ext>
-              </a:extLst>
-            </p:cNvPr>
-            <p:cNvSpPr txBox="1"/>
-            <p:nvPr/>
-          </p:nvSpPr>
-          <p:spPr>
-            <a:xfrm>
-              <a:off x="5397668" y="1503871"/>
-              <a:ext cx="1396664" cy="584775"/>
-            </a:xfrm>
-            <a:prstGeom prst="rect">
-              <a:avLst/>
-            </a:prstGeom>
-            <a:noFill/>
-          </p:spPr>
-          <p:txBody>
-            <a:bodyPr wrap="none" rtlCol="0">
-              <a:spAutoFit/>
-            </a:bodyPr>
-            <a:lstStyle/>
-            <a:p>
-              <a:r>
-                <a:rPr lang="en-GB" sz="1400" dirty="0"/>
-                <a:t>Randomization </a:t>
-              </a:r>
-            </a:p>
-            <a:p>
-              <a:pPr algn="ctr"/>
-              <a:r>
-                <a:rPr lang="en-GB" sz="1400" dirty="0"/>
-                <a:t>(n=100)</a:t>
-              </a:r>
-              <a:r>
-                <a:rPr lang="en-GB" sz="1800" dirty="0"/>
-                <a:t> </a:t>
-              </a:r>
-            </a:p>
-          </p:txBody>
-        </p:sp>
-      </p:grpSp>
-      <p:sp>
-        <p:nvSpPr>
-          <p:cNvPr id="71" name="Oval 70">
-            <a:extLst>
-              <a:ext uri="{FF2B5EF4-FFF2-40B4-BE49-F238E27FC236}">
-                <a16:creationId xmlns:a16="http://schemas.microsoft.com/office/drawing/2014/main" id="{082492E9-6168-4A80-5D43-303B6C539E95}"/>
-              </a:ext>
-            </a:extLst>
-          </p:cNvPr>
-          <p:cNvSpPr/>
-          <p:nvPr/>
-        </p:nvSpPr>
-        <p:spPr>
-          <a:xfrm>
-            <a:off x="3671998" y="655472"/>
-            <a:ext cx="1800000" cy="648000"/>
-          </a:xfrm>
-          <a:prstGeom prst="ellipse">
-            <a:avLst/>
-          </a:prstGeom>
-          <a:solidFill>
-            <a:schemeClr val="bg1"/>
-          </a:solidFill>
-        </p:spPr>
-        <p:style>
-          <a:lnRef idx="2">
-            <a:schemeClr val="accent1">
-              <a:shade val="15000"/>
-            </a:schemeClr>
-          </a:lnRef>
-          <a:fillRef idx="1">
-            <a:schemeClr val="accent1"/>
-          </a:fillRef>
-          <a:effectRef idx="0">
-            <a:schemeClr val="accent1"/>
-          </a:effectRef>
-          <a:fontRef idx="minor">
-            <a:schemeClr val="lt1"/>
-          </a:fontRef>
-        </p:style>
-        <p:txBody>
-          <a:bodyPr rtlCol="0" anchor="ctr"/>
-          <a:lstStyle/>
-          <a:p>
-            <a:pPr algn="ctr"/>
-            <a:r>
-              <a:rPr lang="en-GB" sz="1400" dirty="0">
-                <a:solidFill>
-                  <a:schemeClr val="tx1"/>
-                </a:solidFill>
-              </a:rPr>
-              <a:t>Mechanical Turk</a:t>
-            </a:r>
-          </a:p>
-        </p:txBody>
-      </p:sp>
-      <p:cxnSp>
-        <p:nvCxnSpPr>
-          <p:cNvPr id="96" name="Straight Arrow Connector 95">
-            <a:extLst>
-              <a:ext uri="{FF2B5EF4-FFF2-40B4-BE49-F238E27FC236}">
-                <a16:creationId xmlns:a16="http://schemas.microsoft.com/office/drawing/2014/main" id="{FD378D65-EE3A-67F9-2965-448195565EBF}"/>
-              </a:ext>
-            </a:extLst>
-          </p:cNvPr>
-          <p:cNvCxnSpPr>
-            <a:cxnSpLocks/>
-            <a:stCxn id="16" idx="2"/>
-            <a:endCxn id="37" idx="0"/>
-          </p:cNvCxnSpPr>
-          <p:nvPr/>
-        </p:nvCxnSpPr>
-        <p:spPr>
-          <a:xfrm>
-            <a:off x="5796551" y="3215875"/>
-            <a:ext cx="0" cy="387511"/>
-          </a:xfrm>
-          <a:prstGeom prst="straightConnector1">
-            <a:avLst/>
-          </a:prstGeom>
-          <a:ln>
-            <a:solidFill>
-              <a:schemeClr val="tx1"/>
-            </a:solidFill>
-            <a:headEnd w="lg" len="lg"/>
-            <a:tailEnd type="triangle" w="lg" len="lg"/>
-          </a:ln>
-        </p:spPr>
-        <p:style>
-          <a:lnRef idx="2">
-            <a:schemeClr val="accent1"/>
-          </a:lnRef>
-          <a:fillRef idx="0">
-            <a:schemeClr val="accent1"/>
-          </a:fillRef>
-          <a:effectRef idx="1">
-            <a:schemeClr val="accent1"/>
-          </a:effectRef>
-          <a:fontRef idx="minor">
-            <a:schemeClr val="tx1"/>
-          </a:fontRef>
-        </p:style>
-      </p:cxnSp>
-      <p:cxnSp>
-        <p:nvCxnSpPr>
-          <p:cNvPr id="99" name="Straight Arrow Connector 98">
-            <a:extLst>
-              <a:ext uri="{FF2B5EF4-FFF2-40B4-BE49-F238E27FC236}">
-                <a16:creationId xmlns:a16="http://schemas.microsoft.com/office/drawing/2014/main" id="{EAFF9225-7E7F-ACA8-3B0F-1751F0A6322E}"/>
-              </a:ext>
-            </a:extLst>
-          </p:cNvPr>
-          <p:cNvCxnSpPr>
-            <a:cxnSpLocks/>
-            <a:stCxn id="17" idx="2"/>
-            <a:endCxn id="36" idx="0"/>
-          </p:cNvCxnSpPr>
-          <p:nvPr/>
-        </p:nvCxnSpPr>
-        <p:spPr>
-          <a:xfrm>
-            <a:off x="8105437" y="3209108"/>
-            <a:ext cx="0" cy="394278"/>
-          </a:xfrm>
-          <a:prstGeom prst="straightConnector1">
-            <a:avLst/>
-          </a:prstGeom>
-          <a:ln>
-            <a:solidFill>
-              <a:schemeClr val="tx1"/>
-            </a:solidFill>
-            <a:headEnd w="lg" len="lg"/>
-            <a:tailEnd type="triangle" w="lg" len="lg"/>
-          </a:ln>
-        </p:spPr>
-        <p:style>
-          <a:lnRef idx="2">
-            <a:schemeClr val="accent1"/>
-          </a:lnRef>
-          <a:fillRef idx="0">
-            <a:schemeClr val="accent1"/>
-          </a:fillRef>
-          <a:effectRef idx="1">
-            <a:schemeClr val="accent1"/>
-          </a:effectRef>
-          <a:fontRef idx="minor">
-            <a:schemeClr val="tx1"/>
-          </a:fontRef>
-        </p:style>
-      </p:cxnSp>
-      <p:cxnSp>
-        <p:nvCxnSpPr>
-          <p:cNvPr id="102" name="Straight Arrow Connector 101">
-            <a:extLst>
-              <a:ext uri="{FF2B5EF4-FFF2-40B4-BE49-F238E27FC236}">
-                <a16:creationId xmlns:a16="http://schemas.microsoft.com/office/drawing/2014/main" id="{2526CCDC-FEAF-07ED-7A39-8FBBCF8016D5}"/>
-              </a:ext>
-            </a:extLst>
-          </p:cNvPr>
-          <p:cNvCxnSpPr>
-            <a:cxnSpLocks/>
-            <a:stCxn id="9" idx="2"/>
-            <a:endCxn id="40" idx="0"/>
-          </p:cNvCxnSpPr>
-          <p:nvPr/>
-        </p:nvCxnSpPr>
-        <p:spPr>
-          <a:xfrm>
-            <a:off x="3343125" y="3209108"/>
-            <a:ext cx="0" cy="372336"/>
-          </a:xfrm>
-          <a:prstGeom prst="straightConnector1">
-            <a:avLst/>
-          </a:prstGeom>
-          <a:ln>
-            <a:solidFill>
-              <a:schemeClr val="tx1"/>
-            </a:solidFill>
-            <a:headEnd w="lg" len="lg"/>
-            <a:tailEnd type="triangle" w="lg" len="lg"/>
-          </a:ln>
-        </p:spPr>
-        <p:style>
-          <a:lnRef idx="2">
-            <a:schemeClr val="accent1"/>
-          </a:lnRef>
-          <a:fillRef idx="0">
-            <a:schemeClr val="accent1"/>
-          </a:fillRef>
-          <a:effectRef idx="1">
-            <a:schemeClr val="accent1"/>
-          </a:effectRef>
-          <a:fontRef idx="minor">
-            <a:schemeClr val="tx1"/>
-          </a:fontRef>
-        </p:style>
-      </p:cxnSp>
-      <p:cxnSp>
-        <p:nvCxnSpPr>
-          <p:cNvPr id="105" name="Straight Arrow Connector 104">
-            <a:extLst>
-              <a:ext uri="{FF2B5EF4-FFF2-40B4-BE49-F238E27FC236}">
-                <a16:creationId xmlns:a16="http://schemas.microsoft.com/office/drawing/2014/main" id="{02F239AB-DB6D-82BD-5B63-381E310240E4}"/>
-              </a:ext>
-            </a:extLst>
-          </p:cNvPr>
-          <p:cNvCxnSpPr>
-            <a:cxnSpLocks/>
-            <a:stCxn id="8" idx="2"/>
-            <a:endCxn id="41" idx="0"/>
-          </p:cNvCxnSpPr>
-          <p:nvPr/>
-        </p:nvCxnSpPr>
-        <p:spPr>
-          <a:xfrm>
-            <a:off x="1036804" y="3215875"/>
-            <a:ext cx="0" cy="365569"/>
-          </a:xfrm>
-          <a:prstGeom prst="straightConnector1">
-            <a:avLst/>
-          </a:prstGeom>
-          <a:ln>
-            <a:solidFill>
-              <a:schemeClr val="tx1"/>
-            </a:solidFill>
-            <a:headEnd w="lg" len="lg"/>
-            <a:tailEnd type="triangle" w="lg" len="lg"/>
-          </a:ln>
-        </p:spPr>
-        <p:style>
-          <a:lnRef idx="2">
-            <a:schemeClr val="accent1"/>
-          </a:lnRef>
-          <a:fillRef idx="0">
-            <a:schemeClr val="accent1"/>
-          </a:fillRef>
-          <a:effectRef idx="1">
-            <a:schemeClr val="accent1"/>
-          </a:effectRef>
-          <a:fontRef idx="minor">
-            <a:schemeClr val="tx1"/>
-          </a:fontRef>
-        </p:style>
-      </p:cxnSp>
-      <p:sp>
-        <p:nvSpPr>
-          <p:cNvPr id="127" name="Rectangle 126">
-            <a:extLst>
-              <a:ext uri="{FF2B5EF4-FFF2-40B4-BE49-F238E27FC236}">
-                <a16:creationId xmlns:a16="http://schemas.microsoft.com/office/drawing/2014/main" id="{49A97FB9-D7DB-4D96-032D-28CAD53D95C1}"/>
-              </a:ext>
-            </a:extLst>
-          </p:cNvPr>
-          <p:cNvSpPr/>
-          <p:nvPr/>
-        </p:nvSpPr>
-        <p:spPr>
-          <a:xfrm>
-            <a:off x="6024811" y="4591954"/>
-            <a:ext cx="1800000" cy="648000"/>
-          </a:xfrm>
-          <a:prstGeom prst="rect">
-            <a:avLst/>
-          </a:prstGeom>
-          <a:solidFill>
-            <a:schemeClr val="bg1"/>
-          </a:solidFill>
-        </p:spPr>
-        <p:style>
-          <a:lnRef idx="2">
-            <a:schemeClr val="accent1">
-              <a:shade val="15000"/>
-            </a:schemeClr>
-          </a:lnRef>
-          <a:fillRef idx="1">
-            <a:schemeClr val="accent1"/>
-          </a:fillRef>
-          <a:effectRef idx="0">
-            <a:schemeClr val="accent1"/>
-          </a:effectRef>
-          <a:fontRef idx="minor">
-            <a:schemeClr val="lt1"/>
-          </a:fontRef>
-        </p:style>
-        <p:txBody>
-          <a:bodyPr rtlCol="0" anchor="ctr"/>
-          <a:lstStyle/>
-          <a:p>
-            <a:pPr algn="ctr"/>
-            <a:r>
-              <a:rPr lang="en-GB" sz="1400" dirty="0">
-                <a:solidFill>
-                  <a:schemeClr val="tx1"/>
-                </a:solidFill>
-              </a:rPr>
-              <a:t>Post-Chat Questionnaire</a:t>
-            </a:r>
-          </a:p>
-        </p:txBody>
-      </p:sp>
-      <p:sp>
-        <p:nvSpPr>
-          <p:cNvPr id="128" name="Rectangle 127">
-            <a:extLst>
-              <a:ext uri="{FF2B5EF4-FFF2-40B4-BE49-F238E27FC236}">
-                <a16:creationId xmlns:a16="http://schemas.microsoft.com/office/drawing/2014/main" id="{DC401DD8-0A04-AD1E-0A43-2B5DC141A563}"/>
-              </a:ext>
-            </a:extLst>
-          </p:cNvPr>
-          <p:cNvSpPr/>
-          <p:nvPr/>
-        </p:nvSpPr>
-        <p:spPr>
-          <a:xfrm>
-            <a:off x="6024811" y="5599626"/>
-            <a:ext cx="1800000" cy="648000"/>
-          </a:xfrm>
-          <a:prstGeom prst="rect">
-            <a:avLst/>
-          </a:prstGeom>
-          <a:solidFill>
-            <a:schemeClr val="bg1"/>
-          </a:solidFill>
-        </p:spPr>
-        <p:style>
-          <a:lnRef idx="2">
-            <a:schemeClr val="accent1">
-              <a:shade val="15000"/>
-            </a:schemeClr>
-          </a:lnRef>
-          <a:fillRef idx="1">
-            <a:schemeClr val="accent1"/>
-          </a:fillRef>
-          <a:effectRef idx="0">
-            <a:schemeClr val="accent1"/>
-          </a:effectRef>
-          <a:fontRef idx="minor">
-            <a:schemeClr val="lt1"/>
-          </a:fontRef>
-        </p:style>
-        <p:txBody>
-          <a:bodyPr rtlCol="0" anchor="ctr"/>
-          <a:lstStyle/>
-          <a:p>
-            <a:pPr algn="ctr"/>
-            <a:r>
-              <a:rPr lang="en-GB" sz="1400" dirty="0">
-                <a:solidFill>
-                  <a:schemeClr val="tx1"/>
-                </a:solidFill>
-              </a:rPr>
-              <a:t>Psychological Questionnaires</a:t>
-            </a:r>
-          </a:p>
-        </p:txBody>
-      </p:sp>
-      <p:cxnSp>
-        <p:nvCxnSpPr>
-          <p:cNvPr id="129" name="Straight Arrow Connector 128">
-            <a:extLst>
-              <a:ext uri="{FF2B5EF4-FFF2-40B4-BE49-F238E27FC236}">
-                <a16:creationId xmlns:a16="http://schemas.microsoft.com/office/drawing/2014/main" id="{AD1C381E-0A8D-E253-5923-9A51462DD5DB}"/>
-              </a:ext>
-            </a:extLst>
-          </p:cNvPr>
-          <p:cNvCxnSpPr>
-            <a:cxnSpLocks/>
-            <a:stCxn id="41" idx="2"/>
-            <a:endCxn id="13" idx="0"/>
-          </p:cNvCxnSpPr>
-          <p:nvPr/>
-        </p:nvCxnSpPr>
-        <p:spPr>
-          <a:xfrm>
-            <a:off x="1036804" y="4229444"/>
-            <a:ext cx="1070893" cy="362510"/>
-          </a:xfrm>
-          <a:prstGeom prst="straightConnector1">
-            <a:avLst/>
-          </a:prstGeom>
-          <a:ln>
-            <a:solidFill>
-              <a:schemeClr val="tx1"/>
-            </a:solidFill>
-            <a:headEnd w="lg" len="lg"/>
-            <a:tailEnd type="triangle" w="lg" len="lg"/>
-          </a:ln>
-        </p:spPr>
-        <p:style>
-          <a:lnRef idx="2">
-            <a:schemeClr val="accent1"/>
-          </a:lnRef>
-          <a:fillRef idx="0">
-            <a:schemeClr val="accent1"/>
-          </a:fillRef>
-          <a:effectRef idx="1">
-            <a:schemeClr val="accent1"/>
-          </a:effectRef>
-          <a:fontRef idx="minor">
-            <a:schemeClr val="tx1"/>
-          </a:fontRef>
-        </p:style>
-      </p:cxnSp>
-      <p:cxnSp>
-        <p:nvCxnSpPr>
-          <p:cNvPr id="132" name="Straight Arrow Connector 131">
-            <a:extLst>
-              <a:ext uri="{FF2B5EF4-FFF2-40B4-BE49-F238E27FC236}">
-                <a16:creationId xmlns:a16="http://schemas.microsoft.com/office/drawing/2014/main" id="{C6E8980B-C541-E885-6CD6-2C8377DF2B61}"/>
-              </a:ext>
-            </a:extLst>
-          </p:cNvPr>
-          <p:cNvCxnSpPr>
-            <a:cxnSpLocks/>
-            <a:stCxn id="40" idx="2"/>
-            <a:endCxn id="13" idx="0"/>
-          </p:cNvCxnSpPr>
-          <p:nvPr/>
-        </p:nvCxnSpPr>
-        <p:spPr>
-          <a:xfrm flipH="1">
-            <a:off x="2107697" y="4229444"/>
-            <a:ext cx="1235428" cy="362510"/>
-          </a:xfrm>
-          <a:prstGeom prst="straightConnector1">
-            <a:avLst/>
-          </a:prstGeom>
-          <a:ln>
-            <a:solidFill>
-              <a:schemeClr val="tx1"/>
-            </a:solidFill>
-            <a:headEnd w="lg" len="lg"/>
-            <a:tailEnd type="triangle" w="lg" len="lg"/>
-          </a:ln>
-        </p:spPr>
-        <p:style>
-          <a:lnRef idx="2">
-            <a:schemeClr val="accent1"/>
-          </a:lnRef>
-          <a:fillRef idx="0">
-            <a:schemeClr val="accent1"/>
-          </a:fillRef>
-          <a:effectRef idx="1">
-            <a:schemeClr val="accent1"/>
-          </a:effectRef>
-          <a:fontRef idx="minor">
-            <a:schemeClr val="tx1"/>
-          </a:fontRef>
-        </p:style>
-      </p:cxnSp>
-      <p:cxnSp>
-        <p:nvCxnSpPr>
-          <p:cNvPr id="135" name="Straight Arrow Connector 134">
-            <a:extLst>
-              <a:ext uri="{FF2B5EF4-FFF2-40B4-BE49-F238E27FC236}">
-                <a16:creationId xmlns:a16="http://schemas.microsoft.com/office/drawing/2014/main" id="{EB812DB8-A8CE-883E-F2CB-33519C93CB87}"/>
-              </a:ext>
-            </a:extLst>
-          </p:cNvPr>
-          <p:cNvCxnSpPr>
-            <a:cxnSpLocks/>
-            <a:stCxn id="37" idx="2"/>
-            <a:endCxn id="127" idx="0"/>
-          </p:cNvCxnSpPr>
-          <p:nvPr/>
-        </p:nvCxnSpPr>
-        <p:spPr>
-          <a:xfrm>
-            <a:off x="5796551" y="4251386"/>
-            <a:ext cx="1128260" cy="340568"/>
-          </a:xfrm>
-          <a:prstGeom prst="straightConnector1">
-            <a:avLst/>
-          </a:prstGeom>
-          <a:ln>
-            <a:solidFill>
-              <a:schemeClr val="tx1"/>
-            </a:solidFill>
-            <a:headEnd w="lg" len="lg"/>
-            <a:tailEnd type="triangle" w="lg" len="lg"/>
-          </a:ln>
-        </p:spPr>
-        <p:style>
-          <a:lnRef idx="2">
-            <a:schemeClr val="accent1"/>
-          </a:lnRef>
-          <a:fillRef idx="0">
-            <a:schemeClr val="accent1"/>
-          </a:fillRef>
-          <a:effectRef idx="1">
-            <a:schemeClr val="accent1"/>
-          </a:effectRef>
-          <a:fontRef idx="minor">
-            <a:schemeClr val="tx1"/>
-          </a:fontRef>
-        </p:style>
-      </p:cxnSp>
-      <p:cxnSp>
-        <p:nvCxnSpPr>
-          <p:cNvPr id="138" name="Straight Arrow Connector 137">
-            <a:extLst>
-              <a:ext uri="{FF2B5EF4-FFF2-40B4-BE49-F238E27FC236}">
-                <a16:creationId xmlns:a16="http://schemas.microsoft.com/office/drawing/2014/main" id="{C51CE5B5-E2E9-D750-1E89-F5F86EDFEE6D}"/>
-              </a:ext>
-            </a:extLst>
-          </p:cNvPr>
-          <p:cNvCxnSpPr>
-            <a:cxnSpLocks/>
-            <a:stCxn id="36" idx="2"/>
-            <a:endCxn id="127" idx="0"/>
-          </p:cNvCxnSpPr>
-          <p:nvPr/>
-        </p:nvCxnSpPr>
-        <p:spPr>
-          <a:xfrm flipH="1">
-            <a:off x="6924811" y="4251386"/>
-            <a:ext cx="1180626" cy="340568"/>
-          </a:xfrm>
-          <a:prstGeom prst="straightConnector1">
-            <a:avLst/>
-          </a:prstGeom>
-          <a:ln>
-            <a:solidFill>
-              <a:schemeClr val="tx1"/>
-            </a:solidFill>
-            <a:headEnd w="lg" len="lg"/>
-            <a:tailEnd type="triangle" w="lg" len="lg"/>
-          </a:ln>
-        </p:spPr>
-        <p:style>
-          <a:lnRef idx="2">
-            <a:schemeClr val="accent1"/>
-          </a:lnRef>
-          <a:fillRef idx="0">
-            <a:schemeClr val="accent1"/>
-          </a:fillRef>
-          <a:effectRef idx="1">
-            <a:schemeClr val="accent1"/>
-          </a:effectRef>
-          <a:fontRef idx="minor">
-            <a:schemeClr val="tx1"/>
-          </a:fontRef>
-        </p:style>
-      </p:cxnSp>
-      <p:cxnSp>
-        <p:nvCxnSpPr>
-          <p:cNvPr id="141" name="Straight Arrow Connector 140">
-            <a:extLst>
-              <a:ext uri="{FF2B5EF4-FFF2-40B4-BE49-F238E27FC236}">
-                <a16:creationId xmlns:a16="http://schemas.microsoft.com/office/drawing/2014/main" id="{23E6247E-6F95-0D70-14B9-E18B38E5F4B9}"/>
-              </a:ext>
-            </a:extLst>
-          </p:cNvPr>
-          <p:cNvCxnSpPr>
-            <a:cxnSpLocks/>
-            <a:stCxn id="127" idx="2"/>
-            <a:endCxn id="128" idx="0"/>
-          </p:cNvCxnSpPr>
-          <p:nvPr/>
-        </p:nvCxnSpPr>
-        <p:spPr>
-          <a:xfrm>
-            <a:off x="6924811" y="5239954"/>
-            <a:ext cx="0" cy="359672"/>
-          </a:xfrm>
-          <a:prstGeom prst="straightConnector1">
-            <a:avLst/>
-          </a:prstGeom>
-          <a:ln>
-            <a:solidFill>
-              <a:schemeClr val="tx1"/>
-            </a:solidFill>
-            <a:headEnd w="lg" len="lg"/>
-            <a:tailEnd type="triangle" w="lg" len="lg"/>
-          </a:ln>
-        </p:spPr>
-        <p:style>
-          <a:lnRef idx="2">
-            <a:schemeClr val="accent1"/>
-          </a:lnRef>
-          <a:fillRef idx="0">
-            <a:schemeClr val="accent1"/>
-          </a:fillRef>
-          <a:effectRef idx="1">
-            <a:schemeClr val="accent1"/>
-          </a:effectRef>
-          <a:fontRef idx="minor">
-            <a:schemeClr val="tx1"/>
-          </a:fontRef>
-        </p:style>
-      </p:cxnSp>
-      <p:cxnSp>
-        <p:nvCxnSpPr>
-          <p:cNvPr id="144" name="Straight Arrow Connector 143">
-            <a:extLst>
-              <a:ext uri="{FF2B5EF4-FFF2-40B4-BE49-F238E27FC236}">
-                <a16:creationId xmlns:a16="http://schemas.microsoft.com/office/drawing/2014/main" id="{B727E665-6EE7-69F2-0FCF-815F7992E828}"/>
-              </a:ext>
-            </a:extLst>
-          </p:cNvPr>
-          <p:cNvCxnSpPr>
-            <a:cxnSpLocks/>
-            <a:stCxn id="13" idx="2"/>
-            <a:endCxn id="14" idx="0"/>
-          </p:cNvCxnSpPr>
-          <p:nvPr/>
-        </p:nvCxnSpPr>
-        <p:spPr>
-          <a:xfrm>
-            <a:off x="2107697" y="5239954"/>
-            <a:ext cx="0" cy="359672"/>
-          </a:xfrm>
-          <a:prstGeom prst="straightConnector1">
-            <a:avLst/>
-          </a:prstGeom>
-          <a:ln>
-            <a:solidFill>
-              <a:schemeClr val="tx1"/>
-            </a:solidFill>
-            <a:headEnd w="lg" len="lg"/>
-            <a:tailEnd type="triangle" w="lg" len="lg"/>
-          </a:ln>
-        </p:spPr>
-        <p:style>
-          <a:lnRef idx="2">
-            <a:schemeClr val="accent1"/>
-          </a:lnRef>
-          <a:fillRef idx="0">
-            <a:schemeClr val="accent1"/>
-          </a:fillRef>
-          <a:effectRef idx="1">
-            <a:schemeClr val="accent1"/>
-          </a:effectRef>
-          <a:fontRef idx="minor">
-            <a:schemeClr val="tx1"/>
-          </a:fontRef>
-        </p:style>
-      </p:cxnSp>
-      <p:cxnSp>
-        <p:nvCxnSpPr>
-          <p:cNvPr id="147" name="Straight Arrow Connector 146">
-            <a:extLst>
-              <a:ext uri="{FF2B5EF4-FFF2-40B4-BE49-F238E27FC236}">
-                <a16:creationId xmlns:a16="http://schemas.microsoft.com/office/drawing/2014/main" id="{BB7136AB-80CB-F69F-96E5-355C36077DA1}"/>
-              </a:ext>
-            </a:extLst>
-          </p:cNvPr>
-          <p:cNvCxnSpPr>
-            <a:cxnSpLocks/>
-            <a:stCxn id="14" idx="3"/>
-            <a:endCxn id="158" idx="1"/>
-          </p:cNvCxnSpPr>
-          <p:nvPr/>
-        </p:nvCxnSpPr>
-        <p:spPr>
-          <a:xfrm flipV="1">
-            <a:off x="3007697" y="5153886"/>
-            <a:ext cx="664301" cy="769740"/>
-          </a:xfrm>
-          <a:prstGeom prst="straightConnector1">
-            <a:avLst/>
-          </a:prstGeom>
-          <a:ln>
-            <a:solidFill>
-              <a:schemeClr val="tx1"/>
-            </a:solidFill>
-            <a:headEnd w="lg" len="lg"/>
-            <a:tailEnd type="triangle" w="lg" len="lg"/>
-          </a:ln>
-        </p:spPr>
-        <p:style>
-          <a:lnRef idx="2">
-            <a:schemeClr val="accent1"/>
-          </a:lnRef>
-          <a:fillRef idx="0">
-            <a:schemeClr val="accent1"/>
-          </a:fillRef>
-          <a:effectRef idx="1">
-            <a:schemeClr val="accent1"/>
-          </a:effectRef>
-          <a:fontRef idx="minor">
-            <a:schemeClr val="tx1"/>
-          </a:fontRef>
-        </p:style>
-      </p:cxnSp>
-      <p:cxnSp>
-        <p:nvCxnSpPr>
-          <p:cNvPr id="151" name="Straight Arrow Connector 150">
-            <a:extLst>
-              <a:ext uri="{FF2B5EF4-FFF2-40B4-BE49-F238E27FC236}">
-                <a16:creationId xmlns:a16="http://schemas.microsoft.com/office/drawing/2014/main" id="{91B3B98F-D41A-8BCF-B24E-1432ADA435DB}"/>
-              </a:ext>
-            </a:extLst>
-          </p:cNvPr>
-          <p:cNvCxnSpPr>
-            <a:cxnSpLocks/>
-            <a:stCxn id="128" idx="1"/>
-            <a:endCxn id="158" idx="3"/>
-          </p:cNvCxnSpPr>
-          <p:nvPr/>
-        </p:nvCxnSpPr>
-        <p:spPr>
-          <a:xfrm flipH="1" flipV="1">
-            <a:off x="5471998" y="5153886"/>
-            <a:ext cx="552813" cy="769740"/>
-          </a:xfrm>
-          <a:prstGeom prst="straightConnector1">
-            <a:avLst/>
-          </a:prstGeom>
-          <a:ln>
-            <a:solidFill>
-              <a:schemeClr val="tx1"/>
-            </a:solidFill>
-            <a:headEnd w="lg" len="lg"/>
-            <a:tailEnd type="triangle" w="lg" len="lg"/>
-          </a:ln>
-        </p:spPr>
-        <p:style>
-          <a:lnRef idx="2">
-            <a:schemeClr val="accent1"/>
-          </a:lnRef>
-          <a:fillRef idx="0">
-            <a:schemeClr val="accent1"/>
-          </a:fillRef>
-          <a:effectRef idx="1">
-            <a:schemeClr val="accent1"/>
-          </a:effectRef>
-          <a:fontRef idx="minor">
-            <a:schemeClr val="tx1"/>
-          </a:fontRef>
-        </p:style>
-      </p:cxnSp>
-      <p:sp>
-        <p:nvSpPr>
-          <p:cNvPr id="156" name="TextBox 155">
-            <a:extLst>
-              <a:ext uri="{FF2B5EF4-FFF2-40B4-BE49-F238E27FC236}">
-                <a16:creationId xmlns:a16="http://schemas.microsoft.com/office/drawing/2014/main" id="{FC381741-50A4-D934-2C01-24BF7FBE0377}"/>
-              </a:ext>
-            </a:extLst>
-          </p:cNvPr>
-          <p:cNvSpPr txBox="1"/>
-          <p:nvPr/>
-        </p:nvSpPr>
-        <p:spPr>
-          <a:xfrm>
-            <a:off x="9143994" y="0"/>
-            <a:ext cx="2708049" cy="523220"/>
-          </a:xfrm>
-          <a:prstGeom prst="rect">
-            <a:avLst/>
-          </a:prstGeom>
-          <a:noFill/>
-        </p:spPr>
-        <p:txBody>
-          <a:bodyPr wrap="none" rtlCol="0">
-            <a:spAutoFit/>
-          </a:bodyPr>
-          <a:lstStyle/>
-          <a:p>
-            <a:r>
-              <a:rPr lang="en-GB" sz="2800" b="1" dirty="0"/>
-              <a:t>C	</a:t>
-            </a:r>
-            <a:r>
-              <a:rPr lang="en-GB" sz="2800" dirty="0"/>
-              <a:t>Examples</a:t>
-            </a:r>
-          </a:p>
-        </p:txBody>
-      </p:sp>
-      <p:sp>
-        <p:nvSpPr>
-          <p:cNvPr id="158" name="Rectangle 157">
-            <a:extLst>
-              <a:ext uri="{FF2B5EF4-FFF2-40B4-BE49-F238E27FC236}">
-                <a16:creationId xmlns:a16="http://schemas.microsoft.com/office/drawing/2014/main" id="{00E103DF-0F1A-D92A-3043-1058F56AC7FB}"/>
-              </a:ext>
-            </a:extLst>
-          </p:cNvPr>
-          <p:cNvSpPr/>
-          <p:nvPr/>
-        </p:nvSpPr>
-        <p:spPr>
-          <a:xfrm>
-            <a:off x="3671998" y="4829886"/>
-            <a:ext cx="1800000" cy="648000"/>
-          </a:xfrm>
-          <a:prstGeom prst="rect">
-            <a:avLst/>
-          </a:prstGeom>
-          <a:solidFill>
-            <a:schemeClr val="bg1"/>
-          </a:solidFill>
-        </p:spPr>
-        <p:style>
-          <a:lnRef idx="2">
-            <a:schemeClr val="accent1">
-              <a:shade val="15000"/>
-            </a:schemeClr>
-          </a:lnRef>
-          <a:fillRef idx="1">
-            <a:schemeClr val="accent1"/>
-          </a:fillRef>
-          <a:effectRef idx="0">
-            <a:schemeClr val="accent1"/>
-          </a:effectRef>
-          <a:fontRef idx="minor">
-            <a:schemeClr val="lt1"/>
-          </a:fontRef>
-        </p:style>
-        <p:txBody>
-          <a:bodyPr rtlCol="0" anchor="ctr"/>
-          <a:lstStyle/>
-          <a:p>
-            <a:pPr algn="ctr"/>
-            <a:r>
-              <a:rPr lang="en-GB" sz="1400" dirty="0">
-                <a:solidFill>
-                  <a:schemeClr val="tx1"/>
-                </a:solidFill>
-              </a:rPr>
-              <a:t>Analysis:</a:t>
-            </a:r>
-          </a:p>
-          <a:p>
-            <a:pPr algn="ctr"/>
-            <a:r>
-              <a:rPr lang="en-GB" sz="1400" dirty="0">
-                <a:solidFill>
-                  <a:schemeClr val="tx1"/>
-                </a:solidFill>
-              </a:rPr>
-              <a:t>Exp 1: n=89</a:t>
-            </a:r>
-          </a:p>
-          <a:p>
-            <a:pPr algn="ctr"/>
-            <a:r>
-              <a:rPr lang="en-GB" sz="1400" dirty="0">
-                <a:solidFill>
-                  <a:schemeClr val="tx1"/>
-                </a:solidFill>
-              </a:rPr>
-              <a:t>Exp 2: n=97</a:t>
-            </a:r>
-          </a:p>
-        </p:txBody>
-      </p:sp>
-      <p:cxnSp>
-        <p:nvCxnSpPr>
-          <p:cNvPr id="161" name="Straight Arrow Connector 160">
-            <a:extLst>
-              <a:ext uri="{FF2B5EF4-FFF2-40B4-BE49-F238E27FC236}">
-                <a16:creationId xmlns:a16="http://schemas.microsoft.com/office/drawing/2014/main" id="{22EC379C-6645-2F79-83FF-D2E9ABDC4E43}"/>
-              </a:ext>
-            </a:extLst>
-          </p:cNvPr>
-          <p:cNvCxnSpPr>
-            <a:cxnSpLocks/>
-            <a:stCxn id="158" idx="2"/>
-            <a:endCxn id="4" idx="0"/>
-          </p:cNvCxnSpPr>
-          <p:nvPr/>
-        </p:nvCxnSpPr>
-        <p:spPr>
-          <a:xfrm>
-            <a:off x="4571998" y="5477886"/>
-            <a:ext cx="0" cy="604652"/>
-          </a:xfrm>
-          <a:prstGeom prst="straightConnector1">
-            <a:avLst/>
-          </a:prstGeom>
-          <a:ln>
-            <a:solidFill>
-              <a:schemeClr val="tx1"/>
-            </a:solidFill>
-            <a:headEnd w="lg" len="lg"/>
-            <a:tailEnd type="triangle" w="lg" len="lg"/>
-          </a:ln>
-        </p:spPr>
-        <p:style>
-          <a:lnRef idx="2">
-            <a:schemeClr val="accent1"/>
-          </a:lnRef>
-          <a:fillRef idx="0">
-            <a:schemeClr val="accent1"/>
-          </a:fillRef>
-          <a:effectRef idx="1">
-            <a:schemeClr val="accent1"/>
-          </a:effectRef>
-          <a:fontRef idx="minor">
-            <a:schemeClr val="tx1"/>
-          </a:fontRef>
-        </p:style>
-      </p:cxnSp>
-    </p:spTree>
-    <p:extLst>
-      <p:ext uri="{BB962C8B-B14F-4D97-AF65-F5344CB8AC3E}">
-        <p14:creationId xmlns:p14="http://schemas.microsoft.com/office/powerpoint/2010/main" val="2654144847"/>
-      </p:ext>
-    </p:extLst>
-  </p:cSld>
-  <p:clrMapOvr>
-    <a:masterClrMapping/>
-  </p:clrMapOvr>
-</p:sld>
-</file>
-
-<file path=ppt/slides/slide2.xml><?xml version="1.0" encoding="utf-8"?>
 <p:sld xmlns:a="http://schemas.openxmlformats.org/drawingml/2006/main" xmlns:r="http://schemas.openxmlformats.org/officeDocument/2006/relationships" xmlns:p="http://schemas.openxmlformats.org/presentationml/2006/main">
   <p:cSld>
     <p:spTree>

--- a/figures/figure1_v2.pptx
+++ b/figures/figure1_v2.pptx
@@ -112,99 +112,23 @@
 </p:presentation>
 </file>
 
-<file path=ppt/revisionInfo.xml><?xml version="1.0" encoding="utf-8"?>
-<p1510:revInfo xmlns:a="http://schemas.openxmlformats.org/drawingml/2006/main" xmlns:r="http://schemas.openxmlformats.org/officeDocument/2006/relationships" xmlns:p1510="http://schemas.microsoft.com/office/powerpoint/2015/10/main">
-  <p1510:revLst>
-    <p1510:client id="{AE23CADE-1E1E-4A42-BA53-D7F25A2D2BFC}" v="46" dt="2025-08-06T13:42:17.131"/>
-  </p1510:revLst>
-</p1510:revInfo>
-</file>
-
 <file path=ppt/changesInfos/changesInfo1.xml><?xml version="1.0" encoding="utf-8"?>
 <pc:chgInfo xmlns:a="http://schemas.openxmlformats.org/drawingml/2006/main" xmlns:r="http://schemas.openxmlformats.org/officeDocument/2006/relationships" xmlns:ac="http://schemas.microsoft.com/office/drawing/2013/main/command" xmlns:pc="http://schemas.microsoft.com/office/powerpoint/2013/main/command">
   <pc:docChgLst>
-    <pc:chgData name="Castiello de Obeso, Santiago" userId="b4fc0b8e-1f0e-417a-8aad-015961d2398a" providerId="ADAL" clId="{2A3F39FC-901B-4154-829D-ABB3A00DA094}"/>
-    <pc:docChg chg="undo custSel addSld delSld modSld">
-      <pc:chgData name="Castiello de Obeso, Santiago" userId="b4fc0b8e-1f0e-417a-8aad-015961d2398a" providerId="ADAL" clId="{2A3F39FC-901B-4154-829D-ABB3A00DA094}" dt="2025-03-06T15:18:02.839" v="1699" actId="47"/>
+    <pc:chgData name="Castiello de Obeso, Santiago" userId="b4fc0b8e-1f0e-417a-8aad-015961d2398a" providerId="ADAL" clId="{CDE771A2-018F-48D9-9343-246F847FC0D2}"/>
+    <pc:docChg chg="modSld">
+      <pc:chgData name="Castiello de Obeso, Santiago" userId="b4fc0b8e-1f0e-417a-8aad-015961d2398a" providerId="ADAL" clId="{CDE771A2-018F-48D9-9343-246F847FC0D2}" dt="2026-03-02T14:17:59.864" v="5" actId="20577"/>
       <pc:docMkLst>
         <pc:docMk/>
       </pc:docMkLst>
-      <pc:sldChg chg="addSp delSp modSp new del mod">
-        <pc:chgData name="Castiello de Obeso, Santiago" userId="b4fc0b8e-1f0e-417a-8aad-015961d2398a" providerId="ADAL" clId="{2A3F39FC-901B-4154-829D-ABB3A00DA094}" dt="2025-02-08T15:53:27.381" v="1210" actId="47"/>
-        <pc:sldMkLst>
-          <pc:docMk/>
-          <pc:sldMk cId="2310198615" sldId="256"/>
-        </pc:sldMkLst>
-      </pc:sldChg>
-      <pc:sldChg chg="addSp delSp modSp add del mod">
-        <pc:chgData name="Castiello de Obeso, Santiago" userId="b4fc0b8e-1f0e-417a-8aad-015961d2398a" providerId="ADAL" clId="{2A3F39FC-901B-4154-829D-ABB3A00DA094}" dt="2025-03-06T15:18:02.839" v="1699" actId="47"/>
-        <pc:sldMkLst>
-          <pc:docMk/>
-          <pc:sldMk cId="4023193392" sldId="257"/>
-        </pc:sldMkLst>
-      </pc:sldChg>
-      <pc:sldChg chg="addSp delSp modSp add del mod">
-        <pc:chgData name="Castiello de Obeso, Santiago" userId="b4fc0b8e-1f0e-417a-8aad-015961d2398a" providerId="ADAL" clId="{2A3F39FC-901B-4154-829D-ABB3A00DA094}" dt="2025-03-06T15:18:02.839" v="1699" actId="47"/>
-        <pc:sldMkLst>
-          <pc:docMk/>
-          <pc:sldMk cId="1821791587" sldId="258"/>
-        </pc:sldMkLst>
-      </pc:sldChg>
-      <pc:sldChg chg="addSp delSp modSp add mod">
-        <pc:chgData name="Castiello de Obeso, Santiago" userId="b4fc0b8e-1f0e-417a-8aad-015961d2398a" providerId="ADAL" clId="{2A3F39FC-901B-4154-829D-ABB3A00DA094}" dt="2025-03-06T14:31:40.122" v="1698" actId="21"/>
-        <pc:sldMkLst>
-          <pc:docMk/>
-          <pc:sldMk cId="2654144847" sldId="259"/>
-        </pc:sldMkLst>
-      </pc:sldChg>
-    </pc:docChg>
-  </pc:docChgLst>
-  <pc:docChgLst>
-    <pc:chgData name="Castiello de Obeso, Santiago" userId="b4fc0b8e-1f0e-417a-8aad-015961d2398a" providerId="ADAL" clId="{AE23CADE-1E1E-4A42-BA53-D7F25A2D2BFC}"/>
-    <pc:docChg chg="undo custSel addSld delSld modSld">
-      <pc:chgData name="Castiello de Obeso, Santiago" userId="b4fc0b8e-1f0e-417a-8aad-015961d2398a" providerId="ADAL" clId="{AE23CADE-1E1E-4A42-BA53-D7F25A2D2BFC}" dt="2025-08-26T14:32:41.088" v="542" actId="47"/>
-      <pc:docMkLst>
-        <pc:docMk/>
-      </pc:docMkLst>
-      <pc:sldChg chg="modSp del mod">
-        <pc:chgData name="Castiello de Obeso, Santiago" userId="b4fc0b8e-1f0e-417a-8aad-015961d2398a" providerId="ADAL" clId="{AE23CADE-1E1E-4A42-BA53-D7F25A2D2BFC}" dt="2025-08-26T14:32:39.868" v="540" actId="47"/>
-        <pc:sldMkLst>
-          <pc:docMk/>
-          <pc:sldMk cId="2654144847" sldId="259"/>
-        </pc:sldMkLst>
-      </pc:sldChg>
-      <pc:sldChg chg="addSp delSp modSp add del mod">
-        <pc:chgData name="Castiello de Obeso, Santiago" userId="b4fc0b8e-1f0e-417a-8aad-015961d2398a" providerId="ADAL" clId="{AE23CADE-1E1E-4A42-BA53-D7F25A2D2BFC}" dt="2025-08-26T14:32:41.088" v="542" actId="47"/>
+      <pc:sldChg chg="modSp mod">
+        <pc:chgData name="Castiello de Obeso, Santiago" userId="b4fc0b8e-1f0e-417a-8aad-015961d2398a" providerId="ADAL" clId="{CDE771A2-018F-48D9-9343-246F847FC0D2}" dt="2026-03-02T14:17:59.864" v="5" actId="20577"/>
         <pc:sldMkLst>
           <pc:docMk/>
           <pc:sldMk cId="1224849072" sldId="260"/>
         </pc:sldMkLst>
         <pc:spChg chg="mod">
-          <ac:chgData name="Castiello de Obeso, Santiago" userId="b4fc0b8e-1f0e-417a-8aad-015961d2398a" providerId="ADAL" clId="{AE23CADE-1E1E-4A42-BA53-D7F25A2D2BFC}" dt="2025-07-21T14:31:50.094" v="447" actId="1076"/>
-          <ac:spMkLst>
-            <pc:docMk/>
-            <pc:sldMk cId="1224849072" sldId="260"/>
-            <ac:spMk id="43" creationId="{538AE8B6-488B-BD32-09AA-5AD2BB188193}"/>
-          </ac:spMkLst>
-        </pc:spChg>
-        <pc:spChg chg="mod">
-          <ac:chgData name="Castiello de Obeso, Santiago" userId="b4fc0b8e-1f0e-417a-8aad-015961d2398a" providerId="ADAL" clId="{AE23CADE-1E1E-4A42-BA53-D7F25A2D2BFC}" dt="2025-07-21T14:31:38.002" v="446" actId="1076"/>
-          <ac:spMkLst>
-            <pc:docMk/>
-            <pc:sldMk cId="1224849072" sldId="260"/>
-            <ac:spMk id="44" creationId="{803C3CC7-A45D-E977-777A-E38D05787AEF}"/>
-          </ac:spMkLst>
-        </pc:spChg>
-        <pc:spChg chg="mod">
-          <ac:chgData name="Castiello de Obeso, Santiago" userId="b4fc0b8e-1f0e-417a-8aad-015961d2398a" providerId="ADAL" clId="{AE23CADE-1E1E-4A42-BA53-D7F25A2D2BFC}" dt="2025-07-22T15:16:15.395" v="511" actId="1076"/>
-          <ac:spMkLst>
-            <pc:docMk/>
-            <pc:sldMk cId="1224849072" sldId="260"/>
-            <ac:spMk id="76" creationId="{9E55844A-3E4C-98CF-4705-6451F0AE74F6}"/>
-          </ac:spMkLst>
-        </pc:spChg>
-        <pc:spChg chg="add mod">
-          <ac:chgData name="Castiello de Obeso, Santiago" userId="b4fc0b8e-1f0e-417a-8aad-015961d2398a" providerId="ADAL" clId="{AE23CADE-1E1E-4A42-BA53-D7F25A2D2BFC}" dt="2025-07-22T15:16:15.395" v="511" actId="1076"/>
+          <ac:chgData name="Castiello de Obeso, Santiago" userId="b4fc0b8e-1f0e-417a-8aad-015961d2398a" providerId="ADAL" clId="{CDE771A2-018F-48D9-9343-246F847FC0D2}" dt="2026-03-02T14:17:56.664" v="1" actId="20577"/>
           <ac:spMkLst>
             <pc:docMk/>
             <pc:sldMk cId="1224849072" sldId="260"/>
@@ -212,365 +136,13 @@
           </ac:spMkLst>
         </pc:spChg>
         <pc:spChg chg="mod">
-          <ac:chgData name="Castiello de Obeso, Santiago" userId="b4fc0b8e-1f0e-417a-8aad-015961d2398a" providerId="ADAL" clId="{AE23CADE-1E1E-4A42-BA53-D7F25A2D2BFC}" dt="2025-07-22T15:16:15.395" v="511" actId="1076"/>
-          <ac:spMkLst>
-            <pc:docMk/>
-            <pc:sldMk cId="1224849072" sldId="260"/>
-            <ac:spMk id="78" creationId="{BD1350A1-B17C-105A-AD56-623D97B49724}"/>
-          </ac:spMkLst>
-        </pc:spChg>
-        <pc:spChg chg="add mod">
-          <ac:chgData name="Castiello de Obeso, Santiago" userId="b4fc0b8e-1f0e-417a-8aad-015961d2398a" providerId="ADAL" clId="{AE23CADE-1E1E-4A42-BA53-D7F25A2D2BFC}" dt="2025-07-22T15:16:15.395" v="511" actId="1076"/>
-          <ac:spMkLst>
-            <pc:docMk/>
-            <pc:sldMk cId="1224849072" sldId="260"/>
-            <ac:spMk id="79" creationId="{A78486C1-0FD8-1E1A-ED92-F5CA34B8399D}"/>
-          </ac:spMkLst>
-        </pc:spChg>
-        <pc:spChg chg="add mod">
-          <ac:chgData name="Castiello de Obeso, Santiago" userId="b4fc0b8e-1f0e-417a-8aad-015961d2398a" providerId="ADAL" clId="{AE23CADE-1E1E-4A42-BA53-D7F25A2D2BFC}" dt="2025-07-22T15:16:15.395" v="511" actId="1076"/>
-          <ac:spMkLst>
-            <pc:docMk/>
-            <pc:sldMk cId="1224849072" sldId="260"/>
-            <ac:spMk id="85" creationId="{69CB4265-7258-0F27-6A94-0F4DD14CE0C4}"/>
-          </ac:spMkLst>
-        </pc:spChg>
-        <pc:spChg chg="mod">
-          <ac:chgData name="Castiello de Obeso, Santiago" userId="b4fc0b8e-1f0e-417a-8aad-015961d2398a" providerId="ADAL" clId="{AE23CADE-1E1E-4A42-BA53-D7F25A2D2BFC}" dt="2025-07-22T15:16:15.395" v="511" actId="1076"/>
+          <ac:chgData name="Castiello de Obeso, Santiago" userId="b4fc0b8e-1f0e-417a-8aad-015961d2398a" providerId="ADAL" clId="{CDE771A2-018F-48D9-9343-246F847FC0D2}" dt="2026-03-02T14:17:59.864" v="5" actId="20577"/>
           <ac:spMkLst>
             <pc:docMk/>
             <pc:sldMk cId="1224849072" sldId="260"/>
             <ac:spMk id="86" creationId="{51A3E293-2568-ED6E-FE39-61C400354232}"/>
           </ac:spMkLst>
         </pc:spChg>
-        <pc:spChg chg="mod">
-          <ac:chgData name="Castiello de Obeso, Santiago" userId="b4fc0b8e-1f0e-417a-8aad-015961d2398a" providerId="ADAL" clId="{AE23CADE-1E1E-4A42-BA53-D7F25A2D2BFC}" dt="2025-07-21T14:25:20.635" v="226"/>
-          <ac:spMkLst>
-            <pc:docMk/>
-            <pc:sldMk cId="1224849072" sldId="260"/>
-            <ac:spMk id="92" creationId="{BED71052-B67F-BFC5-ED9E-5DF33A9D3C65}"/>
-          </ac:spMkLst>
-        </pc:spChg>
-        <pc:spChg chg="mod">
-          <ac:chgData name="Castiello de Obeso, Santiago" userId="b4fc0b8e-1f0e-417a-8aad-015961d2398a" providerId="ADAL" clId="{AE23CADE-1E1E-4A42-BA53-D7F25A2D2BFC}" dt="2025-07-21T14:25:20.635" v="226"/>
-          <ac:spMkLst>
-            <pc:docMk/>
-            <pc:sldMk cId="1224849072" sldId="260"/>
-            <ac:spMk id="93" creationId="{B1821D25-1C37-5CA4-1AF3-E772D78327E5}"/>
-          </ac:spMkLst>
-        </pc:spChg>
-        <pc:spChg chg="add mod">
-          <ac:chgData name="Castiello de Obeso, Santiago" userId="b4fc0b8e-1f0e-417a-8aad-015961d2398a" providerId="ADAL" clId="{AE23CADE-1E1E-4A42-BA53-D7F25A2D2BFC}" dt="2025-07-22T15:16:28.763" v="512" actId="1076"/>
-          <ac:spMkLst>
-            <pc:docMk/>
-            <pc:sldMk cId="1224849072" sldId="260"/>
-            <ac:spMk id="170" creationId="{5626262A-BC22-69F0-F2EB-6D96EBAFE54A}"/>
-          </ac:spMkLst>
-        </pc:spChg>
-        <pc:spChg chg="add mod">
-          <ac:chgData name="Castiello de Obeso, Santiago" userId="b4fc0b8e-1f0e-417a-8aad-015961d2398a" providerId="ADAL" clId="{AE23CADE-1E1E-4A42-BA53-D7F25A2D2BFC}" dt="2025-07-22T15:16:28.763" v="512" actId="1076"/>
-          <ac:spMkLst>
-            <pc:docMk/>
-            <pc:sldMk cId="1224849072" sldId="260"/>
-            <ac:spMk id="171" creationId="{19AD26FF-937A-FCC0-9DEA-C6A2C419C7E2}"/>
-          </ac:spMkLst>
-        </pc:spChg>
-        <pc:spChg chg="add mod">
-          <ac:chgData name="Castiello de Obeso, Santiago" userId="b4fc0b8e-1f0e-417a-8aad-015961d2398a" providerId="ADAL" clId="{AE23CADE-1E1E-4A42-BA53-D7F25A2D2BFC}" dt="2025-07-22T15:16:28.763" v="512" actId="1076"/>
-          <ac:spMkLst>
-            <pc:docMk/>
-            <pc:sldMk cId="1224849072" sldId="260"/>
-            <ac:spMk id="172" creationId="{AB045455-325C-9B3E-AEBD-B5BBC1517101}"/>
-          </ac:spMkLst>
-        </pc:spChg>
-        <pc:spChg chg="add mod">
-          <ac:chgData name="Castiello de Obeso, Santiago" userId="b4fc0b8e-1f0e-417a-8aad-015961d2398a" providerId="ADAL" clId="{AE23CADE-1E1E-4A42-BA53-D7F25A2D2BFC}" dt="2025-07-22T15:16:28.763" v="512" actId="1076"/>
-          <ac:spMkLst>
-            <pc:docMk/>
-            <pc:sldMk cId="1224849072" sldId="260"/>
-            <ac:spMk id="173" creationId="{1D859D15-DA5E-85C1-EC4A-42FB98912E6D}"/>
-          </ac:spMkLst>
-        </pc:spChg>
-        <pc:spChg chg="add mod">
-          <ac:chgData name="Castiello de Obeso, Santiago" userId="b4fc0b8e-1f0e-417a-8aad-015961d2398a" providerId="ADAL" clId="{AE23CADE-1E1E-4A42-BA53-D7F25A2D2BFC}" dt="2025-07-22T15:16:28.763" v="512" actId="1076"/>
-          <ac:spMkLst>
-            <pc:docMk/>
-            <pc:sldMk cId="1224849072" sldId="260"/>
-            <ac:spMk id="174" creationId="{FF88FBEE-8940-9B75-5D6A-87CB2ED63345}"/>
-          </ac:spMkLst>
-        </pc:spChg>
-        <pc:spChg chg="add mod">
-          <ac:chgData name="Castiello de Obeso, Santiago" userId="b4fc0b8e-1f0e-417a-8aad-015961d2398a" providerId="ADAL" clId="{AE23CADE-1E1E-4A42-BA53-D7F25A2D2BFC}" dt="2025-07-22T15:16:28.763" v="512" actId="1076"/>
-          <ac:spMkLst>
-            <pc:docMk/>
-            <pc:sldMk cId="1224849072" sldId="260"/>
-            <ac:spMk id="175" creationId="{ACCB3A5A-5F06-AF37-6CB9-E10B7FD17ED9}"/>
-          </ac:spMkLst>
-        </pc:spChg>
-        <pc:spChg chg="mod">
-          <ac:chgData name="Castiello de Obeso, Santiago" userId="b4fc0b8e-1f0e-417a-8aad-015961d2398a" providerId="ADAL" clId="{AE23CADE-1E1E-4A42-BA53-D7F25A2D2BFC}" dt="2025-07-21T14:28:02.478" v="366"/>
-          <ac:spMkLst>
-            <pc:docMk/>
-            <pc:sldMk cId="1224849072" sldId="260"/>
-            <ac:spMk id="179" creationId="{88B34CB9-9A7C-DD4C-4E7A-6E053D2EE4D7}"/>
-          </ac:spMkLst>
-        </pc:spChg>
-        <pc:spChg chg="mod">
-          <ac:chgData name="Castiello de Obeso, Santiago" userId="b4fc0b8e-1f0e-417a-8aad-015961d2398a" providerId="ADAL" clId="{AE23CADE-1E1E-4A42-BA53-D7F25A2D2BFC}" dt="2025-07-21T14:28:02.478" v="366"/>
-          <ac:spMkLst>
-            <pc:docMk/>
-            <pc:sldMk cId="1224849072" sldId="260"/>
-            <ac:spMk id="180" creationId="{3A52034E-E05F-9E51-2A7E-A1CDB9224399}"/>
-          </ac:spMkLst>
-        </pc:spChg>
-        <pc:spChg chg="add mod">
-          <ac:chgData name="Castiello de Obeso, Santiago" userId="b4fc0b8e-1f0e-417a-8aad-015961d2398a" providerId="ADAL" clId="{AE23CADE-1E1E-4A42-BA53-D7F25A2D2BFC}" dt="2025-08-06T13:42:03.716" v="528" actId="20577"/>
-          <ac:spMkLst>
-            <pc:docMk/>
-            <pc:sldMk cId="1224849072" sldId="260"/>
-            <ac:spMk id="186" creationId="{BEF032A2-6003-68ED-F49F-0B6F845C118C}"/>
-          </ac:spMkLst>
-        </pc:spChg>
-        <pc:spChg chg="add mod">
-          <ac:chgData name="Castiello de Obeso, Santiago" userId="b4fc0b8e-1f0e-417a-8aad-015961d2398a" providerId="ADAL" clId="{AE23CADE-1E1E-4A42-BA53-D7F25A2D2BFC}" dt="2025-08-06T13:42:07.596" v="536" actId="20577"/>
-          <ac:spMkLst>
-            <pc:docMk/>
-            <pc:sldMk cId="1224849072" sldId="260"/>
-            <ac:spMk id="187" creationId="{1955CB17-AEAD-B2D9-625B-A952206ECD1F}"/>
-          </ac:spMkLst>
-        </pc:spChg>
-        <pc:spChg chg="add mod">
-          <ac:chgData name="Castiello de Obeso, Santiago" userId="b4fc0b8e-1f0e-417a-8aad-015961d2398a" providerId="ADAL" clId="{AE23CADE-1E1E-4A42-BA53-D7F25A2D2BFC}" dt="2025-07-22T15:16:08.188" v="510" actId="1038"/>
-          <ac:spMkLst>
-            <pc:docMk/>
-            <pc:sldMk cId="1224849072" sldId="260"/>
-            <ac:spMk id="188" creationId="{612E66B1-B7C8-48DF-8B33-23BE70D18688}"/>
-          </ac:spMkLst>
-        </pc:spChg>
-        <pc:spChg chg="add mod">
-          <ac:chgData name="Castiello de Obeso, Santiago" userId="b4fc0b8e-1f0e-417a-8aad-015961d2398a" providerId="ADAL" clId="{AE23CADE-1E1E-4A42-BA53-D7F25A2D2BFC}" dt="2025-07-22T15:16:08.188" v="510" actId="1038"/>
-          <ac:spMkLst>
-            <pc:docMk/>
-            <pc:sldMk cId="1224849072" sldId="260"/>
-            <ac:spMk id="189" creationId="{ECB424C5-25C7-A1C6-C701-C36341FECAC6}"/>
-          </ac:spMkLst>
-        </pc:spChg>
-        <pc:spChg chg="add mod">
-          <ac:chgData name="Castiello de Obeso, Santiago" userId="b4fc0b8e-1f0e-417a-8aad-015961d2398a" providerId="ADAL" clId="{AE23CADE-1E1E-4A42-BA53-D7F25A2D2BFC}" dt="2025-08-06T13:42:05.591" v="529"/>
-          <ac:spMkLst>
-            <pc:docMk/>
-            <pc:sldMk cId="1224849072" sldId="260"/>
-            <ac:spMk id="190" creationId="{E431D458-EF90-90C3-A29B-C7A739C1FC6D}"/>
-          </ac:spMkLst>
-        </pc:spChg>
-        <pc:spChg chg="add mod">
-          <ac:chgData name="Castiello de Obeso, Santiago" userId="b4fc0b8e-1f0e-417a-8aad-015961d2398a" providerId="ADAL" clId="{AE23CADE-1E1E-4A42-BA53-D7F25A2D2BFC}" dt="2025-08-06T13:42:10.485" v="537"/>
-          <ac:spMkLst>
-            <pc:docMk/>
-            <pc:sldMk cId="1224849072" sldId="260"/>
-            <ac:spMk id="191" creationId="{3FC2D38A-F51B-7E69-BA3C-15EA9D256BA7}"/>
-          </ac:spMkLst>
-        </pc:spChg>
-        <pc:spChg chg="mod">
-          <ac:chgData name="Castiello de Obeso, Santiago" userId="b4fc0b8e-1f0e-417a-8aad-015961d2398a" providerId="ADAL" clId="{AE23CADE-1E1E-4A42-BA53-D7F25A2D2BFC}" dt="2025-07-21T14:28:07.508" v="368"/>
-          <ac:spMkLst>
-            <pc:docMk/>
-            <pc:sldMk cId="1224849072" sldId="260"/>
-            <ac:spMk id="195" creationId="{D68EDF0C-DB8E-EEDA-E2A9-5D41965ABC11}"/>
-          </ac:spMkLst>
-        </pc:spChg>
-        <pc:spChg chg="mod">
-          <ac:chgData name="Castiello de Obeso, Santiago" userId="b4fc0b8e-1f0e-417a-8aad-015961d2398a" providerId="ADAL" clId="{AE23CADE-1E1E-4A42-BA53-D7F25A2D2BFC}" dt="2025-07-21T14:28:07.508" v="368"/>
-          <ac:spMkLst>
-            <pc:docMk/>
-            <pc:sldMk cId="1224849072" sldId="260"/>
-            <ac:spMk id="196" creationId="{202B1698-5536-F3FC-CBF8-D534135D2A19}"/>
-          </ac:spMkLst>
-        </pc:spChg>
-        <pc:spChg chg="add mod">
-          <ac:chgData name="Castiello de Obeso, Santiago" userId="b4fc0b8e-1f0e-417a-8aad-015961d2398a" providerId="ADAL" clId="{AE23CADE-1E1E-4A42-BA53-D7F25A2D2BFC}" dt="2025-07-21T14:31:58.973" v="448" actId="1076"/>
-          <ac:spMkLst>
-            <pc:docMk/>
-            <pc:sldMk cId="1224849072" sldId="260"/>
-            <ac:spMk id="205" creationId="{92340E75-BE2B-FB18-A979-C26D1495A47E}"/>
-          </ac:spMkLst>
-        </pc:spChg>
-        <pc:spChg chg="add mod">
-          <ac:chgData name="Castiello de Obeso, Santiago" userId="b4fc0b8e-1f0e-417a-8aad-015961d2398a" providerId="ADAL" clId="{AE23CADE-1E1E-4A42-BA53-D7F25A2D2BFC}" dt="2025-07-22T15:16:15.395" v="511" actId="1076"/>
-          <ac:spMkLst>
-            <pc:docMk/>
-            <pc:sldMk cId="1224849072" sldId="260"/>
-            <ac:spMk id="207" creationId="{3CEDA06F-FE5B-38CA-3506-B643DBF0F81C}"/>
-          </ac:spMkLst>
-        </pc:spChg>
-        <pc:spChg chg="add mod">
-          <ac:chgData name="Castiello de Obeso, Santiago" userId="b4fc0b8e-1f0e-417a-8aad-015961d2398a" providerId="ADAL" clId="{AE23CADE-1E1E-4A42-BA53-D7F25A2D2BFC}" dt="2025-07-29T14:54:13.137" v="520" actId="6549"/>
-          <ac:spMkLst>
-            <pc:docMk/>
-            <pc:sldMk cId="1224849072" sldId="260"/>
-            <ac:spMk id="212" creationId="{63B8C8F8-43F6-8994-3D69-B8FE3A4D1049}"/>
-          </ac:spMkLst>
-        </pc:spChg>
-        <pc:spChg chg="add mod">
-          <ac:chgData name="Castiello de Obeso, Santiago" userId="b4fc0b8e-1f0e-417a-8aad-015961d2398a" providerId="ADAL" clId="{AE23CADE-1E1E-4A42-BA53-D7F25A2D2BFC}" dt="2025-07-22T15:16:08.188" v="510" actId="1038"/>
-          <ac:spMkLst>
-            <pc:docMk/>
-            <pc:sldMk cId="1224849072" sldId="260"/>
-            <ac:spMk id="214" creationId="{54AF0165-F1BE-00D7-37C2-FA20BA0020E5}"/>
-          </ac:spMkLst>
-        </pc:spChg>
-        <pc:grpChg chg="mod">
-          <ac:chgData name="Castiello de Obeso, Santiago" userId="b4fc0b8e-1f0e-417a-8aad-015961d2398a" providerId="ADAL" clId="{AE23CADE-1E1E-4A42-BA53-D7F25A2D2BFC}" dt="2025-07-22T15:16:15.395" v="511" actId="1076"/>
-          <ac:grpSpMkLst>
-            <pc:docMk/>
-            <pc:sldMk cId="1224849072" sldId="260"/>
-            <ac:grpSpMk id="91" creationId="{D3F83303-FD52-7983-44E1-EC7C54DD8BFB}"/>
-          </ac:grpSpMkLst>
-        </pc:grpChg>
-        <pc:grpChg chg="add mod">
-          <ac:chgData name="Castiello de Obeso, Santiago" userId="b4fc0b8e-1f0e-417a-8aad-015961d2398a" providerId="ADAL" clId="{AE23CADE-1E1E-4A42-BA53-D7F25A2D2BFC}" dt="2025-07-22T15:16:28.763" v="512" actId="1076"/>
-          <ac:grpSpMkLst>
-            <pc:docMk/>
-            <pc:sldMk cId="1224849072" sldId="260"/>
-            <ac:grpSpMk id="178" creationId="{AC3B1C14-B3BE-F405-494E-6D28A2A6C9D6}"/>
-          </ac:grpSpMkLst>
-        </pc:grpChg>
-        <pc:grpChg chg="add mod">
-          <ac:chgData name="Castiello de Obeso, Santiago" userId="b4fc0b8e-1f0e-417a-8aad-015961d2398a" providerId="ADAL" clId="{AE23CADE-1E1E-4A42-BA53-D7F25A2D2BFC}" dt="2025-07-22T15:16:08.188" v="510" actId="1038"/>
-          <ac:grpSpMkLst>
-            <pc:docMk/>
-            <pc:sldMk cId="1224849072" sldId="260"/>
-            <ac:grpSpMk id="194" creationId="{D7DCB42A-CA4A-ABA7-960F-3A384C580014}"/>
-          </ac:grpSpMkLst>
-        </pc:grpChg>
-        <pc:cxnChg chg="mod">
-          <ac:chgData name="Castiello de Obeso, Santiago" userId="b4fc0b8e-1f0e-417a-8aad-015961d2398a" providerId="ADAL" clId="{AE23CADE-1E1E-4A42-BA53-D7F25A2D2BFC}" dt="2025-07-22T15:16:15.395" v="511" actId="1076"/>
-          <ac:cxnSpMkLst>
-            <pc:docMk/>
-            <pc:sldMk cId="1224849072" sldId="260"/>
-            <ac:cxnSpMk id="89" creationId="{8B4ACC4E-D9F7-49F5-F7E7-9DE3BB1AAEB8}"/>
-          </ac:cxnSpMkLst>
-        </pc:cxnChg>
-        <pc:cxnChg chg="mod">
-          <ac:chgData name="Castiello de Obeso, Santiago" userId="b4fc0b8e-1f0e-417a-8aad-015961d2398a" providerId="ADAL" clId="{AE23CADE-1E1E-4A42-BA53-D7F25A2D2BFC}" dt="2025-07-21T14:27:44.462" v="361" actId="1076"/>
-          <ac:cxnSpMkLst>
-            <pc:docMk/>
-            <pc:sldMk cId="1224849072" sldId="260"/>
-            <ac:cxnSpMk id="90" creationId="{14583604-B211-B042-999D-4A59EC472123}"/>
-          </ac:cxnSpMkLst>
-        </pc:cxnChg>
-        <pc:cxnChg chg="mod">
-          <ac:chgData name="Castiello de Obeso, Santiago" userId="b4fc0b8e-1f0e-417a-8aad-015961d2398a" providerId="ADAL" clId="{AE23CADE-1E1E-4A42-BA53-D7F25A2D2BFC}" dt="2025-07-22T15:16:15.395" v="511" actId="1076"/>
-          <ac:cxnSpMkLst>
-            <pc:docMk/>
-            <pc:sldMk cId="1224849072" sldId="260"/>
-            <ac:cxnSpMk id="107" creationId="{F34700B3-B28E-1CCD-514F-FD1E559F9C97}"/>
-          </ac:cxnSpMkLst>
-        </pc:cxnChg>
-        <pc:cxnChg chg="mod">
-          <ac:chgData name="Castiello de Obeso, Santiago" userId="b4fc0b8e-1f0e-417a-8aad-015961d2398a" providerId="ADAL" clId="{AE23CADE-1E1E-4A42-BA53-D7F25A2D2BFC}" dt="2025-07-21T14:26:41.312" v="245" actId="1076"/>
-          <ac:cxnSpMkLst>
-            <pc:docMk/>
-            <pc:sldMk cId="1224849072" sldId="260"/>
-            <ac:cxnSpMk id="110" creationId="{9E118143-C25C-5A44-C917-AC8138E5C343}"/>
-          </ac:cxnSpMkLst>
-        </pc:cxnChg>
-        <pc:cxnChg chg="mod">
-          <ac:chgData name="Castiello de Obeso, Santiago" userId="b4fc0b8e-1f0e-417a-8aad-015961d2398a" providerId="ADAL" clId="{AE23CADE-1E1E-4A42-BA53-D7F25A2D2BFC}" dt="2025-07-21T14:26:41.312" v="245" actId="1076"/>
-          <ac:cxnSpMkLst>
-            <pc:docMk/>
-            <pc:sldMk cId="1224849072" sldId="260"/>
-            <ac:cxnSpMk id="111" creationId="{4987CAFD-EFC8-317D-FA10-B07FE9FB3216}"/>
-          </ac:cxnSpMkLst>
-        </pc:cxnChg>
-        <pc:cxnChg chg="mod">
-          <ac:chgData name="Castiello de Obeso, Santiago" userId="b4fc0b8e-1f0e-417a-8aad-015961d2398a" providerId="ADAL" clId="{AE23CADE-1E1E-4A42-BA53-D7F25A2D2BFC}" dt="2025-07-21T14:26:50.713" v="246" actId="1076"/>
-          <ac:cxnSpMkLst>
-            <pc:docMk/>
-            <pc:sldMk cId="1224849072" sldId="260"/>
-            <ac:cxnSpMk id="115" creationId="{3C38AEC5-BE1A-005F-9C80-A5F72F2E77F6}"/>
-          </ac:cxnSpMkLst>
-        </pc:cxnChg>
-        <pc:cxnChg chg="add mod">
-          <ac:chgData name="Castiello de Obeso, Santiago" userId="b4fc0b8e-1f0e-417a-8aad-015961d2398a" providerId="ADAL" clId="{AE23CADE-1E1E-4A42-BA53-D7F25A2D2BFC}" dt="2025-07-22T15:16:28.763" v="512" actId="1076"/>
-          <ac:cxnSpMkLst>
-            <pc:docMk/>
-            <pc:sldMk cId="1224849072" sldId="260"/>
-            <ac:cxnSpMk id="182" creationId="{10785D4B-72D1-0A7F-C7B3-451329179E4B}"/>
-          </ac:cxnSpMkLst>
-        </pc:cxnChg>
-        <pc:cxnChg chg="mod">
-          <ac:chgData name="Castiello de Obeso, Santiago" userId="b4fc0b8e-1f0e-417a-8aad-015961d2398a" providerId="ADAL" clId="{AE23CADE-1E1E-4A42-BA53-D7F25A2D2BFC}" dt="2025-07-21T14:30:50.112" v="401" actId="1076"/>
-          <ac:cxnSpMkLst>
-            <pc:docMk/>
-            <pc:sldMk cId="1224849072" sldId="260"/>
-            <ac:cxnSpMk id="184" creationId="{7215CE42-6A79-FB39-D04A-593D57F2897D}"/>
-          </ac:cxnSpMkLst>
-        </pc:cxnChg>
-        <pc:cxnChg chg="mod">
-          <ac:chgData name="Castiello de Obeso, Santiago" userId="b4fc0b8e-1f0e-417a-8aad-015961d2398a" providerId="ADAL" clId="{AE23CADE-1E1E-4A42-BA53-D7F25A2D2BFC}" dt="2025-07-21T14:30:50.112" v="401" actId="1076"/>
-          <ac:cxnSpMkLst>
-            <pc:docMk/>
-            <pc:sldMk cId="1224849072" sldId="260"/>
-            <ac:cxnSpMk id="185" creationId="{DDF8D9B2-AA93-E235-9A23-73208B57C11F}"/>
-          </ac:cxnSpMkLst>
-        </pc:cxnChg>
-        <pc:cxnChg chg="add mod">
-          <ac:chgData name="Castiello de Obeso, Santiago" userId="b4fc0b8e-1f0e-417a-8aad-015961d2398a" providerId="ADAL" clId="{AE23CADE-1E1E-4A42-BA53-D7F25A2D2BFC}" dt="2025-07-22T15:16:08.188" v="510" actId="1038"/>
-          <ac:cxnSpMkLst>
-            <pc:docMk/>
-            <pc:sldMk cId="1224849072" sldId="260"/>
-            <ac:cxnSpMk id="197" creationId="{9AD5B131-CD96-EECC-C99E-065F555083DD}"/>
-          </ac:cxnSpMkLst>
-        </pc:cxnChg>
-        <pc:cxnChg chg="mod">
-          <ac:chgData name="Castiello de Obeso, Santiago" userId="b4fc0b8e-1f0e-417a-8aad-015961d2398a" providerId="ADAL" clId="{AE23CADE-1E1E-4A42-BA53-D7F25A2D2BFC}" dt="2025-07-22T15:16:08.188" v="510" actId="1038"/>
-          <ac:cxnSpMkLst>
-            <pc:docMk/>
-            <pc:sldMk cId="1224849072" sldId="260"/>
-            <ac:cxnSpMk id="198" creationId="{29B82110-1D56-9BDC-3B41-502B184857A8}"/>
-          </ac:cxnSpMkLst>
-        </pc:cxnChg>
-        <pc:cxnChg chg="mod">
-          <ac:chgData name="Castiello de Obeso, Santiago" userId="b4fc0b8e-1f0e-417a-8aad-015961d2398a" providerId="ADAL" clId="{AE23CADE-1E1E-4A42-BA53-D7F25A2D2BFC}" dt="2025-07-21T14:30:38.427" v="400" actId="1076"/>
-          <ac:cxnSpMkLst>
-            <pc:docMk/>
-            <pc:sldMk cId="1224849072" sldId="260"/>
-            <ac:cxnSpMk id="200" creationId="{269D2220-00C6-DD8B-88C2-E381971C561C}"/>
-          </ac:cxnSpMkLst>
-        </pc:cxnChg>
-        <pc:cxnChg chg="mod">
-          <ac:chgData name="Castiello de Obeso, Santiago" userId="b4fc0b8e-1f0e-417a-8aad-015961d2398a" providerId="ADAL" clId="{AE23CADE-1E1E-4A42-BA53-D7F25A2D2BFC}" dt="2025-07-21T14:30:28.180" v="399" actId="14100"/>
-          <ac:cxnSpMkLst>
-            <pc:docMk/>
-            <pc:sldMk cId="1224849072" sldId="260"/>
-            <ac:cxnSpMk id="201" creationId="{55940225-A1E1-93BF-EBB3-60E6551FF88D}"/>
-          </ac:cxnSpMkLst>
-        </pc:cxnChg>
-        <pc:cxnChg chg="add mod">
-          <ac:chgData name="Castiello de Obeso, Santiago" userId="b4fc0b8e-1f0e-417a-8aad-015961d2398a" providerId="ADAL" clId="{AE23CADE-1E1E-4A42-BA53-D7F25A2D2BFC}" dt="2025-07-22T15:14:42.600" v="469" actId="14100"/>
-          <ac:cxnSpMkLst>
-            <pc:docMk/>
-            <pc:sldMk cId="1224849072" sldId="260"/>
-            <ac:cxnSpMk id="209" creationId="{4F312682-C17B-5A63-7261-B2A8E0BFF3F1}"/>
-          </ac:cxnSpMkLst>
-        </pc:cxnChg>
-        <pc:cxnChg chg="add mod">
-          <ac:chgData name="Castiello de Obeso, Santiago" userId="b4fc0b8e-1f0e-417a-8aad-015961d2398a" providerId="ADAL" clId="{AE23CADE-1E1E-4A42-BA53-D7F25A2D2BFC}" dt="2025-07-22T15:16:28.763" v="512" actId="1076"/>
-          <ac:cxnSpMkLst>
-            <pc:docMk/>
-            <pc:sldMk cId="1224849072" sldId="260"/>
-            <ac:cxnSpMk id="213" creationId="{CA08CEB9-6D10-26DC-7F31-8EDE32DAD0C8}"/>
-          </ac:cxnSpMkLst>
-        </pc:cxnChg>
-        <pc:cxnChg chg="add mod">
-          <ac:chgData name="Castiello de Obeso, Santiago" userId="b4fc0b8e-1f0e-417a-8aad-015961d2398a" providerId="ADAL" clId="{AE23CADE-1E1E-4A42-BA53-D7F25A2D2BFC}" dt="2025-07-22T15:15:30.051" v="483" actId="1076"/>
-          <ac:cxnSpMkLst>
-            <pc:docMk/>
-            <pc:sldMk cId="1224849072" sldId="260"/>
-            <ac:cxnSpMk id="215" creationId="{FD963D25-2AD3-58DB-2067-D0685192DD51}"/>
-          </ac:cxnSpMkLst>
-        </pc:cxnChg>
       </pc:sldChg>
     </pc:docChg>
   </pc:docChgLst>
@@ -726,7 +298,7 @@
           <a:p>
             <a:fld id="{0AFA125D-6C16-440D-B65A-850231F6884E}" type="datetimeFigureOut">
               <a:rPr lang="en-GB" smtClean="0"/>
-              <a:t>26/08/2025</a:t>
+              <a:t>02/03/2026</a:t>
             </a:fld>
             <a:endParaRPr lang="en-GB"/>
           </a:p>
@@ -926,7 +498,7 @@
           <a:p>
             <a:fld id="{0AFA125D-6C16-440D-B65A-850231F6884E}" type="datetimeFigureOut">
               <a:rPr lang="en-GB" smtClean="0"/>
-              <a:t>26/08/2025</a:t>
+              <a:t>02/03/2026</a:t>
             </a:fld>
             <a:endParaRPr lang="en-GB"/>
           </a:p>
@@ -1136,7 +708,7 @@
           <a:p>
             <a:fld id="{0AFA125D-6C16-440D-B65A-850231F6884E}" type="datetimeFigureOut">
               <a:rPr lang="en-GB" smtClean="0"/>
-              <a:t>26/08/2025</a:t>
+              <a:t>02/03/2026</a:t>
             </a:fld>
             <a:endParaRPr lang="en-GB"/>
           </a:p>
@@ -1336,7 +908,7 @@
           <a:p>
             <a:fld id="{0AFA125D-6C16-440D-B65A-850231F6884E}" type="datetimeFigureOut">
               <a:rPr lang="en-GB" smtClean="0"/>
-              <a:t>26/08/2025</a:t>
+              <a:t>02/03/2026</a:t>
             </a:fld>
             <a:endParaRPr lang="en-GB"/>
           </a:p>
@@ -1612,7 +1184,7 @@
           <a:p>
             <a:fld id="{0AFA125D-6C16-440D-B65A-850231F6884E}" type="datetimeFigureOut">
               <a:rPr lang="en-GB" smtClean="0"/>
-              <a:t>26/08/2025</a:t>
+              <a:t>02/03/2026</a:t>
             </a:fld>
             <a:endParaRPr lang="en-GB"/>
           </a:p>
@@ -1880,7 +1452,7 @@
           <a:p>
             <a:fld id="{0AFA125D-6C16-440D-B65A-850231F6884E}" type="datetimeFigureOut">
               <a:rPr lang="en-GB" smtClean="0"/>
-              <a:t>26/08/2025</a:t>
+              <a:t>02/03/2026</a:t>
             </a:fld>
             <a:endParaRPr lang="en-GB"/>
           </a:p>
@@ -2295,7 +1867,7 @@
           <a:p>
             <a:fld id="{0AFA125D-6C16-440D-B65A-850231F6884E}" type="datetimeFigureOut">
               <a:rPr lang="en-GB" smtClean="0"/>
-              <a:t>26/08/2025</a:t>
+              <a:t>02/03/2026</a:t>
             </a:fld>
             <a:endParaRPr lang="en-GB"/>
           </a:p>
@@ -2437,7 +2009,7 @@
           <a:p>
             <a:fld id="{0AFA125D-6C16-440D-B65A-850231F6884E}" type="datetimeFigureOut">
               <a:rPr lang="en-GB" smtClean="0"/>
-              <a:t>26/08/2025</a:t>
+              <a:t>02/03/2026</a:t>
             </a:fld>
             <a:endParaRPr lang="en-GB"/>
           </a:p>
@@ -2550,7 +2122,7 @@
           <a:p>
             <a:fld id="{0AFA125D-6C16-440D-B65A-850231F6884E}" type="datetimeFigureOut">
               <a:rPr lang="en-GB" smtClean="0"/>
-              <a:t>26/08/2025</a:t>
+              <a:t>02/03/2026</a:t>
             </a:fld>
             <a:endParaRPr lang="en-GB"/>
           </a:p>
@@ -2863,7 +2435,7 @@
           <a:p>
             <a:fld id="{0AFA125D-6C16-440D-B65A-850231F6884E}" type="datetimeFigureOut">
               <a:rPr lang="en-GB" smtClean="0"/>
-              <a:t>26/08/2025</a:t>
+              <a:t>02/03/2026</a:t>
             </a:fld>
             <a:endParaRPr lang="en-GB"/>
           </a:p>
@@ -3152,7 +2724,7 @@
           <a:p>
             <a:fld id="{0AFA125D-6C16-440D-B65A-850231F6884E}" type="datetimeFigureOut">
               <a:rPr lang="en-GB" smtClean="0"/>
-              <a:t>26/08/2025</a:t>
+              <a:t>02/03/2026</a:t>
             </a:fld>
             <a:endParaRPr lang="en-GB"/>
           </a:p>
@@ -3395,7 +2967,7 @@
           <a:p>
             <a:fld id="{0AFA125D-6C16-440D-B65A-850231F6884E}" type="datetimeFigureOut">
               <a:rPr lang="en-GB" smtClean="0"/>
-              <a:t>26/08/2025</a:t>
+              <a:t>02/03/2026</a:t>
             </a:fld>
             <a:endParaRPr lang="en-GB"/>
           </a:p>
@@ -4007,7 +3579,7 @@
                   <a:srgbClr val="D55E00"/>
                 </a:solidFill>
               </a:rPr>
-              <a:t>Non-Anxious</a:t>
+              <a:t>Non-anxious</a:t>
             </a:r>
           </a:p>
         </p:txBody>
@@ -4235,7 +3807,7 @@
                   <a:srgbClr val="D55E00"/>
                 </a:solidFill>
               </a:rPr>
-              <a:t>Non-Anxious</a:t>
+              <a:t>Non-anxious</a:t>
             </a:r>
           </a:p>
         </p:txBody>
